--- a/04/ppt/04-1_Matplotlib으로_그래프_이해하기.pptx
+++ b/04/ppt/04-1_Matplotlib으로_그래프_이해하기.pptx
@@ -2,28 +2,28 @@
 <file path=ppt/presentation.xml><?xml version="1.0" encoding="utf-8"?>
 <p:presentation xmlns:p="http://schemas.openxmlformats.org/presentationml/2006/main">
   <p:sldMasterIdLst>
-    <p:sldMasterId xmlns:r="http://schemas.openxmlformats.org/officeDocument/2006/relationships" id="2147483648" r:id="Rb4ca2237df674a92"/>
+    <p:sldMasterId xmlns:r="http://schemas.openxmlformats.org/officeDocument/2006/relationships" id="2147483648" r:id="R58c2d0af2672410e"/>
   </p:sldMasterIdLst>
   <p:notesMasterIdLst>
-    <p:notesMasterId xmlns:r="http://schemas.openxmlformats.org/officeDocument/2006/relationships" r:id="R1ff7823ab2f24ffc"/>
+    <p:notesMasterId xmlns:r="http://schemas.openxmlformats.org/officeDocument/2006/relationships" r:id="Ra1f9cb3480944684"/>
   </p:notesMasterIdLst>
   <p:sldIdLst>
-    <p:sldId xmlns:r="http://schemas.openxmlformats.org/officeDocument/2006/relationships" id="256" r:id="Raa37a657b3ec418a"/>
-    <p:sldId xmlns:r="http://schemas.openxmlformats.org/officeDocument/2006/relationships" id="257" r:id="R221f1926f24d41ed"/>
-    <p:sldId xmlns:r="http://schemas.openxmlformats.org/officeDocument/2006/relationships" id="258" r:id="Rf69abab91f7f49cf"/>
-    <p:sldId xmlns:r="http://schemas.openxmlformats.org/officeDocument/2006/relationships" id="259" r:id="R126ee0e8641c4ba0"/>
-    <p:sldId xmlns:r="http://schemas.openxmlformats.org/officeDocument/2006/relationships" id="260" r:id="Ra522a28704804f6f"/>
-    <p:sldId xmlns:r="http://schemas.openxmlformats.org/officeDocument/2006/relationships" id="261" r:id="Rad1b633ab8224be1"/>
-    <p:sldId xmlns:r="http://schemas.openxmlformats.org/officeDocument/2006/relationships" id="262" r:id="Ra3ea402bfe1a45b1"/>
-    <p:sldId xmlns:r="http://schemas.openxmlformats.org/officeDocument/2006/relationships" id="263" r:id="R30cb65cfc1e24996"/>
-    <p:sldId xmlns:r="http://schemas.openxmlformats.org/officeDocument/2006/relationships" id="264" r:id="Ra38472350a184c1a"/>
-    <p:sldId xmlns:r="http://schemas.openxmlformats.org/officeDocument/2006/relationships" id="265" r:id="R6ad7dd73669f47d3"/>
-    <p:sldId xmlns:r="http://schemas.openxmlformats.org/officeDocument/2006/relationships" id="266" r:id="R3d86a15281c24bce"/>
-    <p:sldId xmlns:r="http://schemas.openxmlformats.org/officeDocument/2006/relationships" id="267" r:id="Rda672f51c7a448c2"/>
-    <p:sldId xmlns:r="http://schemas.openxmlformats.org/officeDocument/2006/relationships" id="268" r:id="Ra6a3a419f73e4491"/>
-    <p:sldId xmlns:r="http://schemas.openxmlformats.org/officeDocument/2006/relationships" id="269" r:id="R15c113c0796f46b1"/>
-    <p:sldId xmlns:r="http://schemas.openxmlformats.org/officeDocument/2006/relationships" id="270" r:id="R261896ca747f4e5f"/>
-    <p:sldId xmlns:r="http://schemas.openxmlformats.org/officeDocument/2006/relationships" id="271" r:id="Rd93c6b2683ac4a52"/>
+    <p:sldId xmlns:r="http://schemas.openxmlformats.org/officeDocument/2006/relationships" id="256" r:id="Ra3876ef7c3b749d1"/>
+    <p:sldId xmlns:r="http://schemas.openxmlformats.org/officeDocument/2006/relationships" id="257" r:id="R67667dedfb0646f0"/>
+    <p:sldId xmlns:r="http://schemas.openxmlformats.org/officeDocument/2006/relationships" id="258" r:id="Rbdb9abcca41b4752"/>
+    <p:sldId xmlns:r="http://schemas.openxmlformats.org/officeDocument/2006/relationships" id="259" r:id="Rb9ba65fb08bb42d6"/>
+    <p:sldId xmlns:r="http://schemas.openxmlformats.org/officeDocument/2006/relationships" id="260" r:id="Rf621adc968a647b6"/>
+    <p:sldId xmlns:r="http://schemas.openxmlformats.org/officeDocument/2006/relationships" id="261" r:id="R66f641d5e050474a"/>
+    <p:sldId xmlns:r="http://schemas.openxmlformats.org/officeDocument/2006/relationships" id="262" r:id="R4947e5bc11a24165"/>
+    <p:sldId xmlns:r="http://schemas.openxmlformats.org/officeDocument/2006/relationships" id="263" r:id="R977333d5a4fe40d3"/>
+    <p:sldId xmlns:r="http://schemas.openxmlformats.org/officeDocument/2006/relationships" id="264" r:id="R8d4fc1b2fc114170"/>
+    <p:sldId xmlns:r="http://schemas.openxmlformats.org/officeDocument/2006/relationships" id="265" r:id="R9d3e5eb566eb48c9"/>
+    <p:sldId xmlns:r="http://schemas.openxmlformats.org/officeDocument/2006/relationships" id="266" r:id="Rc3a3e31e101d4638"/>
+    <p:sldId xmlns:r="http://schemas.openxmlformats.org/officeDocument/2006/relationships" id="267" r:id="R42801206765c4caa"/>
+    <p:sldId xmlns:r="http://schemas.openxmlformats.org/officeDocument/2006/relationships" id="268" r:id="Rfcc0f4c394c9451f"/>
+    <p:sldId xmlns:r="http://schemas.openxmlformats.org/officeDocument/2006/relationships" id="269" r:id="Ra7d64db0f7a84ebd"/>
+    <p:sldId xmlns:r="http://schemas.openxmlformats.org/officeDocument/2006/relationships" id="270" r:id="R25bcfa6bbfce49fa"/>
+    <p:sldId xmlns:r="http://schemas.openxmlformats.org/officeDocument/2006/relationships" id="271" r:id="R3865cc8c36f348ff"/>
   </p:sldIdLst>
   <p:sldSz cx="12191695" cy="6858000"/>
   <p:notesSz cx="6858000" cy="9144000"/>
@@ -597,7 +597,7 @@
           <a:lstStyle xmlns:a="http://schemas.openxmlformats.org/drawingml/2006/main"/>
           <a:p xmlns:a="http://schemas.openxmlformats.org/drawingml/2006/main">
             <a:r>
-              <a:t>첫 줄의 date, visitors, borrowed_books를 읽고 각각 무엇을 뜻하는지 추측하게 합니다. 마지막 행까지 내려가 데이터가 60줄인지 확인합니다.</a:t>
+              <a:t>첫 줄의 date, visitors, borrowed_books를 읽고 각각 무엇을 뜻하는지 확인합니다. 머리글이 1행이므로 실제 데이터는 Excel 2행부터 61행까지이며, 마지막 행 번호가 61이어도 데이터는 60줄이라고 짚습니다.</a:t>
             </a:r>
           </a:p>
         </p:txBody>
@@ -667,7 +667,7 @@
           <a:lstStyle xmlns:a="http://schemas.openxmlformats.org/drawingml/2006/main"/>
           <a:p xmlns:a="http://schemas.openxmlformats.org/drawingml/2006/main">
             <a:r>
-              <a:t>이 데이터에는 12주 평일 기록이 있습니다. 전체 방문자는 완만하게 늘고, 금요일 대출은 반복해서 높습니다. 정답 그래프를 먼저 말하지 않고 AI에게 자료의 의미부터 묻게 합니다.</a:t>
+              <a:t>date는 기록의 순서를, visitors와 borrowed_books는 날짜마다 달라지는 값을 담습니다. 날짜를 가로축에 놓고 두 값 가운데 하나를 세로축에 놓으면 시간에 따른 변화를 볼 수 있습니다. 어느 값을 고를지는 정하지 않고 AI에게 자료의 의미와 추천 이유부터 묻게 합니다.</a:t>
             </a:r>
           </a:p>
         </p:txBody>
@@ -737,7 +737,7 @@
           <a:lstStyle xmlns:a="http://schemas.openxmlformats.org/drawingml/2006/main"/>
           <a:p xmlns:a="http://schemas.openxmlformats.org/drawingml/2006/main">
             <a:r>
-              <a:t>세 요청을 한 번에 보내지 않습니다. 1번 답에서 머리글과 60줄을 확인하고, 2번 답에서 선택한 열과 이유를 검토한 뒤, 3번에서 실제 파일 수정을 맡깁니다.</a:t>
+              <a:t>세 요청을 한 번에 보내지 않습니다. 1번 답에서 머리글과 60줄을 Excel 원본과 비교합니다. 맞으면 2번 답에서 추천한 그래프와 사용할 열, 이유를 읽습니다. 추천이 자료와 맞는지 확인한 뒤에만 3번에서 실제 파일 수정을 맡깁니다. AI가 완료했다고 답하면 대화창에 머물지 않고 실제 Notebook으로 돌아갑니다.</a:t>
             </a:r>
           </a:p>
         </p:txBody>
@@ -807,7 +807,7 @@
           <a:lstStyle xmlns:a="http://schemas.openxmlformats.org/drawingml/2006/main"/>
           <a:p xmlns:a="http://schemas.openxmlformats.org/drawingml/2006/main">
             <a:r>
-              <a:t>학생은 04-1_exercise.ipynb로 돌아와 AI가 작성한 셀을 직접 실행합니다. 오류가 나면 마지막 줄을 복사해 같은 대화에 이어서 보냅니다.</a:t>
+              <a:t>AI가 작업을 마쳤다고 답하면 VS Code에서 notebooks/04-1_exercise.ipynb를 직접 엽니다. 수정해 달라고 한 파일이 맞는지 확인하고 코드 셀을 위에서 아래로 실행합니다. AI가 다른 파일도 수정했다고 말하면 왜 수정했는지 먼저 묻습니다. 오류가 나면 오류 셀과 마지막 줄을 같은 대화에 보냅니다.</a:t>
             </a:r>
           </a:p>
         </p:txBody>
@@ -947,7 +947,7 @@
           <a:lstStyle xmlns:a="http://schemas.openxmlformats.org/drawingml/2006/main"/>
           <a:p xmlns:a="http://schemas.openxmlformats.org/drawingml/2006/main">
             <a:r>
-              <a:t>오늘은 pyproject.toml과 uv sync의 관계를 읽고, 오류를 AI가 판단할 수 있도록 빠짐없이 전달했습니다. AI의 작업 내역과 실제 파일을 확인한 뒤 같은 셀을 다시 실행했고, 마지막에는 그래프의 행 수, 열 이름과 표시가 맞는지 검토했습니다. 4-2에서는 동일한 60행 데이터를 CSV로 읽습니다.</a:t>
+              <a:t>오늘의 목표는 그래프 하나를 띄우는 데서 끝나지 않습니다. 자료의 뜻을 먼저 읽고, 필요한 작업을 AI에게 나누어 요청하고, AI가 만든 결과를 원본과 비교했습니다. 이 과정을 거쳐야 그래프를 믿고 사용할 수 있습니다. 4-2에서는 동일한 60행 데이터를 CSV로 읽습니다.</a:t>
             </a:r>
           </a:p>
         </p:txBody>
@@ -1087,7 +1087,7 @@
           <a:lstStyle xmlns:a="http://schemas.openxmlformats.org/drawingml/2006/main"/>
           <a:p xmlns:a="http://schemas.openxmlformats.org/drawingml/2006/main">
             <a:r>
-              <a:t>표와 그래프가 같은 숫자를 담고 있음을 확인한 뒤, 어느 쪽이 더 좋다고 바로 답하지 않습니다. 왜 같은 자료를 여러 모습으로 보는지 학생들에게 먼저 묻고 다음 슬라이드로 넘어갑니다.</a:t>
+              <a:t>표에서는 목요일 이용 인원이 32명이라는 정확한 값을 찾기 쉽고, 그래프에서는 목요일 막대가 가장 높다는 전체 모습이 먼저 보입니다. 어느 쪽이 더 좋다고 답하기보다, 목적에 따라 알맞은 표현이 달라진다는 질문을 남기고 다음 슬라이드로 넘어갑니다.</a:t>
             </a:r>
           </a:p>
         </p:txBody>
@@ -1227,7 +1227,7 @@
           <a:lstStyle xmlns:a="http://schemas.openxmlformats.org/drawingml/2006/main"/>
           <a:p xmlns:a="http://schemas.openxmlformats.org/drawingml/2006/main">
             <a:r>
-              <a:t>pyproject.toml을 학생들과 함께 읽습니다. requires-python은 사용할 Python의 범위이고, dependencies는 필요한 라이브러리 목록입니다. ipykernel은 Notebook 실행에, openpyxl은 Excel 파일 읽기에 사용합니다. matplotlib은 아직 없습니다. uv sync가 pyproject.toml과 uv.lock을 보고 이 프로젝트에 맞는 .venv를 준비한다고 설명합니다.</a:t>
+              <a:t>이제 컴퓨터로 그래프를 그리려면 matplotlib이 필요하다고 연결합니다. 바로 실행하기 전에 pyproject.toml을 열어 이미 준비됐는지 확인합니다. requires-python은 사용할 Python의 범위이고, dependencies는 필요한 라이브러리 목록입니다. ipykernel은 Notebook 실행에, openpyxl은 Excel 파일 읽기에 사용하며 matplotlib은 아직 없습니다. uv sync가 pyproject.toml과 uv.lock을 보고 이 프로젝트에 맞는 .venv를 준비한다고 설명합니다.</a:t>
             </a:r>
           </a:p>
         </p:txBody>
@@ -1297,7 +1297,7 @@
           <a:lstStyle xmlns:a="http://schemas.openxmlformats.org/drawingml/2006/main"/>
           <a:p xmlns:a="http://schemas.openxmlformats.org/drawingml/2006/main">
             <a:r>
-              <a:t>라이브러리는 다른 사람이 만들어 둔 여러 기능을 한데 모아 내 코드에서 꺼내 쓸 수 있게 한 묶음이라고 먼저 설명합니다. matplotlib에는 표의 숫자를 그래프로 그리는 기능이 들어 있습니다. 파스타를 만들 때 시판 재료를 가져와 자기 요리를 완성하는 모습과 연결합니다.</a:t>
+              <a:t>라이브러리는 다른 사람이 미리 만들어 둔 기능의 묶음입니다. 파스타를 만들 때 시판 소스와 면을 가져오고 자기 재료를 더하듯, 필요한 기능을 골라 내 데이터와 원하는 표현 방법을 더해 결과를 만듭니다. matplotlib에는 표의 숫자를 그래프로 그리는 기능이 들어 있습니다.</a:t>
             </a:r>
           </a:p>
         </p:txBody>
@@ -1437,7 +1437,7 @@
           <a:lstStyle xmlns:a="http://schemas.openxmlformats.org/drawingml/2006/main"/>
           <a:p xmlns:a="http://schemas.openxmlformats.org/drawingml/2006/main">
             <a:r>
-              <a:t>AI의 응답에는 어떤 명령을 실행했고 어떤 파일을 바꿨는지 작업 내역이 나옵니다. 그 내용을 먼저 읽고, pyproject.toml을 직접 열어 dependencies에 matplotlib이 실제로 추가됐는지 확인합니다. 작업 보고와 파일이 같으면 커널을 다시 시작합니다.</a:t>
+              <a:t>AI의 응답에는 어떤 명령을 실행했고 어떤 파일을 바꿨는지 작업 내역이 나옵니다. 그 내용을 먼저 읽고, pyproject.toml을 직접 열어 dependencies에 matplotlib이 실제로 추가됐는지 확인합니다. 새 라이브러리를 추가해도 실행 중인 Notebook이 바로 알아차리지 못할 수 있으므로, 작업 보고와 파일이 같으면 커널을 다시 시작합니다.</a:t>
             </a:r>
           </a:p>
         </p:txBody>
@@ -1575,7 +1575,7 @@
   </p:cSld>
   <p:clrMap bg1="lt1" tx1="dk1" bg2="lt2" tx2="dk2" accent1="accent1" accent2="accent2" accent3="accent3" accent4="accent4" accent5="accent5" accent6="accent6" hlink="hlink" folHlink="folHlink"/>
   <p:sldLayoutIdLst>
-    <p:sldLayoutId xmlns:r="http://schemas.openxmlformats.org/officeDocument/2006/relationships" id="2147483649" r:id="Rd13456c61c5e4bd5"/>
+    <p:sldLayoutId xmlns:r="http://schemas.openxmlformats.org/officeDocument/2006/relationships" id="2147483649" r:id="R5a86e1a35bab4dbc"/>
   </p:sldLayoutIdLst>
   <p:txStyles>
     <p:titleStyle>
@@ -2126,7 +2126,7 @@
           <p:cNvPr id="7" name="">
             <a:extLst xmlns:a="http://schemas.openxmlformats.org/drawingml/2006/main">
               <a:ext uri="{FF2B5EF4-FFF2-40B4-BE49-F238E27FC236}">
-                <a16:creationId xmlns:a16="http://schemas.microsoft.com/office/drawing/2014/main" id="{0F835257-6419-411D-A7B1-9DEA8D2CB376}"/>
+                <a16:creationId xmlns:a16="http://schemas.microsoft.com/office/drawing/2014/main" id="{95DD14FE-A381-4149-9CA0-33741CD8B88D}"/>
               </a:ext>
             </a:extLst>
           </p:cNvPr>
@@ -2158,7 +2158,7 @@
           <p:cNvPr id="2" name="">
             <a:extLst xmlns:a="http://schemas.openxmlformats.org/drawingml/2006/main">
               <a:ext uri="{FF2B5EF4-FFF2-40B4-BE49-F238E27FC236}">
-                <a16:creationId xmlns:a16="http://schemas.microsoft.com/office/drawing/2014/main" id="{A30A7EE1-0CDE-4DAD-A0AE-D35C7B7A0FE0}"/>
+                <a16:creationId xmlns:a16="http://schemas.microsoft.com/office/drawing/2014/main" id="{541A752A-8A54-4432-9F85-231C94E0813D}"/>
               </a:ext>
             </a:extLst>
           </p:cNvPr>
@@ -2219,7 +2219,7 @@
           <p:cNvPr id="3" name="">
             <a:extLst xmlns:a="http://schemas.openxmlformats.org/drawingml/2006/main">
               <a:ext uri="{FF2B5EF4-FFF2-40B4-BE49-F238E27FC236}">
-                <a16:creationId xmlns:a16="http://schemas.microsoft.com/office/drawing/2014/main" id="{43300FC1-D3ED-4DAB-B1B2-5CC97092EC08}"/>
+                <a16:creationId xmlns:a16="http://schemas.microsoft.com/office/drawing/2014/main" id="{97903700-3D42-474C-90A6-FEAFCF47148B}"/>
               </a:ext>
             </a:extLst>
           </p:cNvPr>
@@ -2307,7 +2307,7 @@
           <p:cNvPr id="4" name="">
             <a:extLst xmlns:a="http://schemas.openxmlformats.org/drawingml/2006/main">
               <a:ext uri="{FF2B5EF4-FFF2-40B4-BE49-F238E27FC236}">
-                <a16:creationId xmlns:a16="http://schemas.microsoft.com/office/drawing/2014/main" id="{6BB77314-00A0-46D3-B175-03F8E6FEBAA4}"/>
+                <a16:creationId xmlns:a16="http://schemas.microsoft.com/office/drawing/2014/main" id="{BE8D0F2E-FF1F-4947-9F58-2FA6F9A72F2A}"/>
               </a:ext>
             </a:extLst>
           </p:cNvPr>
@@ -2395,7 +2395,7 @@
           <p:cNvPr id="5" name="">
             <a:extLst xmlns:a="http://schemas.openxmlformats.org/drawingml/2006/main">
               <a:ext uri="{FF2B5EF4-FFF2-40B4-BE49-F238E27FC236}">
-                <a16:creationId xmlns:a16="http://schemas.microsoft.com/office/drawing/2014/main" id="{E88896F1-82A5-4E09-8020-F80368593823}"/>
+                <a16:creationId xmlns:a16="http://schemas.microsoft.com/office/drawing/2014/main" id="{50725630-59F7-4D9F-A915-608FC67D0955}"/>
               </a:ext>
             </a:extLst>
           </p:cNvPr>
@@ -2456,7 +2456,7 @@
           <p:cNvPr id="6" name="">
             <a:extLst xmlns:a="http://schemas.openxmlformats.org/drawingml/2006/main">
               <a:ext uri="{FF2B5EF4-FFF2-40B4-BE49-F238E27FC236}">
-                <a16:creationId xmlns:a16="http://schemas.microsoft.com/office/drawing/2014/main" id="{3C6160E0-BD62-47F1-A21B-4BD8C814A219}"/>
+                <a16:creationId xmlns:a16="http://schemas.microsoft.com/office/drawing/2014/main" id="{EE28B25F-1147-4606-81EA-EAF88AC1D39A}"/>
               </a:ext>
             </a:extLst>
           </p:cNvPr>
@@ -2515,7 +2515,7 @@
     </p:spTree>
     <p:extLst>
       <p:ext uri="{BB962C8B-B14F-4D97-AF65-F5344CB8AC3E}">
-        <p14:creationId xmlns:p14="http://schemas.microsoft.com/office/powerpoint/2010/main" val="817798661"/>
+        <p14:creationId xmlns:p14="http://schemas.microsoft.com/office/powerpoint/2010/main" val="1209176388"/>
       </p:ext>
     </p:extLst>
   </p:cSld>
@@ -2546,7 +2546,7 @@
           <p:cNvPr id="19" name="">
             <a:extLst xmlns:a="http://schemas.openxmlformats.org/drawingml/2006/main">
               <a:ext uri="{FF2B5EF4-FFF2-40B4-BE49-F238E27FC236}">
-                <a16:creationId xmlns:a16="http://schemas.microsoft.com/office/drawing/2014/main" id="{FBE7884A-71AF-4066-ABC3-84DD6B560791}"/>
+                <a16:creationId xmlns:a16="http://schemas.microsoft.com/office/drawing/2014/main" id="{93A35CB2-5510-4F77-B151-106090DF1C2F}"/>
               </a:ext>
             </a:extLst>
           </p:cNvPr>
@@ -2607,7 +2607,7 @@
           <p:cNvPr id="2" name="">
             <a:extLst xmlns:a="http://schemas.openxmlformats.org/drawingml/2006/main">
               <a:ext uri="{FF2B5EF4-FFF2-40B4-BE49-F238E27FC236}">
-                <a16:creationId xmlns:a16="http://schemas.microsoft.com/office/drawing/2014/main" id="{6E2CD39B-5A3E-4075-9166-5D842F522CE0}"/>
+                <a16:creationId xmlns:a16="http://schemas.microsoft.com/office/drawing/2014/main" id="{1CF5BDB5-8C84-49B9-BE83-E0BFAAABDA42}"/>
               </a:ext>
             </a:extLst>
           </p:cNvPr>
@@ -2668,7 +2668,7 @@
           <p:cNvPr id="3" name="">
             <a:extLst xmlns:a="http://schemas.openxmlformats.org/drawingml/2006/main">
               <a:ext uri="{FF2B5EF4-FFF2-40B4-BE49-F238E27FC236}">
-                <a16:creationId xmlns:a16="http://schemas.microsoft.com/office/drawing/2014/main" id="{64DCF7EA-85E5-4EF8-AF26-AD1AA5EDC00F}"/>
+                <a16:creationId xmlns:a16="http://schemas.microsoft.com/office/drawing/2014/main" id="{F3CF7E40-5E30-463B-BF5D-62B3B726CB6F}"/>
               </a:ext>
             </a:extLst>
           </p:cNvPr>
@@ -2729,7 +2729,7 @@
           <p:cNvPr id="4" name="">
             <a:extLst xmlns:a="http://schemas.openxmlformats.org/drawingml/2006/main">
               <a:ext uri="{FF2B5EF4-FFF2-40B4-BE49-F238E27FC236}">
-                <a16:creationId xmlns:a16="http://schemas.microsoft.com/office/drawing/2014/main" id="{7783FC82-1392-4E43-8F1A-4CA7ADBA0E09}"/>
+                <a16:creationId xmlns:a16="http://schemas.microsoft.com/office/drawing/2014/main" id="{BE30C4F5-A64E-4DA3-92FF-271A4B3C457B}"/>
               </a:ext>
             </a:extLst>
           </p:cNvPr>
@@ -2761,7 +2761,7 @@
           <p:cNvPr id="5" name="">
             <a:extLst xmlns:a="http://schemas.openxmlformats.org/drawingml/2006/main">
               <a:ext uri="{FF2B5EF4-FFF2-40B4-BE49-F238E27FC236}">
-                <a16:creationId xmlns:a16="http://schemas.microsoft.com/office/drawing/2014/main" id="{BEF74446-0B7B-4CE2-8E01-A778A91B29FB}"/>
+                <a16:creationId xmlns:a16="http://schemas.microsoft.com/office/drawing/2014/main" id="{51359B1B-71B0-4938-A653-28087BE564D2}"/>
               </a:ext>
             </a:extLst>
           </p:cNvPr>
@@ -2822,7 +2822,7 @@
           <p:cNvPr id="6" name="">
             <a:extLst xmlns:a="http://schemas.openxmlformats.org/drawingml/2006/main">
               <a:ext uri="{FF2B5EF4-FFF2-40B4-BE49-F238E27FC236}">
-                <a16:creationId xmlns:a16="http://schemas.microsoft.com/office/drawing/2014/main" id="{F1C56C4E-9374-4B63-BC5B-500FF877DE20}"/>
+                <a16:creationId xmlns:a16="http://schemas.microsoft.com/office/drawing/2014/main" id="{741CAB3E-BBFD-4BC8-9A9D-B4BE7D7ECC8F}"/>
               </a:ext>
             </a:extLst>
           </p:cNvPr>
@@ -2873,7 +2873,7 @@
                 <a:ea typeface="IBM Plex Sans KR"/>
                 <a:cs typeface="IBM Plex Sans KR"/>
               </a:rPr>
-              <a:t>교과서 04-1 · 10쪽</a:t>
+              <a:t>교과서 04-1 · 13쪽</a:t>
             </a:r>
           </a:p>
         </p:txBody>
@@ -2883,7 +2883,7 @@
           <p:cNvPr id="7" name="">
             <a:extLst xmlns:a="http://schemas.openxmlformats.org/drawingml/2006/main">
               <a:ext uri="{FF2B5EF4-FFF2-40B4-BE49-F238E27FC236}">
-                <a16:creationId xmlns:a16="http://schemas.microsoft.com/office/drawing/2014/main" id="{3E04AAA0-18D4-445E-95A8-ECE86036D503}"/>
+                <a16:creationId xmlns:a16="http://schemas.microsoft.com/office/drawing/2014/main" id="{C6BF3A57-5CDB-4283-80CE-650DB94D2688}"/>
               </a:ext>
             </a:extLst>
           </p:cNvPr>
@@ -2944,7 +2944,7 @@
           <p:cNvPr id="8" name="">
             <a:extLst xmlns:a="http://schemas.openxmlformats.org/drawingml/2006/main">
               <a:ext uri="{FF2B5EF4-FFF2-40B4-BE49-F238E27FC236}">
-                <a16:creationId xmlns:a16="http://schemas.microsoft.com/office/drawing/2014/main" id="{660BBF0D-850C-46B0-A26B-764F6EA39C56}"/>
+                <a16:creationId xmlns:a16="http://schemas.microsoft.com/office/drawing/2014/main" id="{B817FA87-24A0-451B-A403-BCED8EDA99CE}"/>
               </a:ext>
             </a:extLst>
           </p:cNvPr>
@@ -3005,7 +3005,7 @@
           <p:cNvPr id="9" name="">
             <a:extLst xmlns:a="http://schemas.openxmlformats.org/drawingml/2006/main">
               <a:ext uri="{FF2B5EF4-FFF2-40B4-BE49-F238E27FC236}">
-                <a16:creationId xmlns:a16="http://schemas.microsoft.com/office/drawing/2014/main" id="{3BCAB3A7-1683-4A97-A6F3-E0DBB2BE4A12}"/>
+                <a16:creationId xmlns:a16="http://schemas.microsoft.com/office/drawing/2014/main" id="{A5B40CC2-E830-4B19-BFC6-BC6B66BCA03C}"/>
               </a:ext>
             </a:extLst>
           </p:cNvPr>
@@ -3039,7 +3039,7 @@
           <p:cNvPr id="10" name="">
             <a:extLst xmlns:a="http://schemas.openxmlformats.org/drawingml/2006/main">
               <a:ext uri="{FF2B5EF4-FFF2-40B4-BE49-F238E27FC236}">
-                <a16:creationId xmlns:a16="http://schemas.microsoft.com/office/drawing/2014/main" id="{6F587981-667F-4E13-9D2A-B3C189E9C86E}"/>
+                <a16:creationId xmlns:a16="http://schemas.microsoft.com/office/drawing/2014/main" id="{45E6C7ED-342F-421A-8752-B21DD76E58F6}"/>
               </a:ext>
             </a:extLst>
           </p:cNvPr>
@@ -3100,7 +3100,7 @@
           <p:cNvPr id="11" name="">
             <a:extLst xmlns:a="http://schemas.openxmlformats.org/drawingml/2006/main">
               <a:ext uri="{FF2B5EF4-FFF2-40B4-BE49-F238E27FC236}">
-                <a16:creationId xmlns:a16="http://schemas.microsoft.com/office/drawing/2014/main" id="{3673B2E7-1A23-425C-B403-8702469157B2}"/>
+                <a16:creationId xmlns:a16="http://schemas.microsoft.com/office/drawing/2014/main" id="{3EEB5C5F-9564-4453-A0A4-374A0B0DD817}"/>
               </a:ext>
             </a:extLst>
           </p:cNvPr>
@@ -3161,7 +3161,7 @@
           <p:cNvPr id="12" name="">
             <a:extLst xmlns:a="http://schemas.openxmlformats.org/drawingml/2006/main">
               <a:ext uri="{FF2B5EF4-FFF2-40B4-BE49-F238E27FC236}">
-                <a16:creationId xmlns:a16="http://schemas.microsoft.com/office/drawing/2014/main" id="{943026F4-3CEB-47F9-B265-01CF7A228707}"/>
+                <a16:creationId xmlns:a16="http://schemas.microsoft.com/office/drawing/2014/main" id="{B2BDA477-4EE3-42FE-B7A9-286F7CDEE11F}"/>
               </a:ext>
             </a:extLst>
           </p:cNvPr>
@@ -3249,7 +3249,7 @@
           <p:cNvPr id="13" name="">
             <a:extLst xmlns:a="http://schemas.openxmlformats.org/drawingml/2006/main">
               <a:ext uri="{FF2B5EF4-FFF2-40B4-BE49-F238E27FC236}">
-                <a16:creationId xmlns:a16="http://schemas.microsoft.com/office/drawing/2014/main" id="{EC50D699-9C96-48CD-A602-6CB75BE4766D}"/>
+                <a16:creationId xmlns:a16="http://schemas.microsoft.com/office/drawing/2014/main" id="{F1DBCDA7-54DF-4812-9577-BBEF7025437B}"/>
               </a:ext>
             </a:extLst>
           </p:cNvPr>
@@ -3310,7 +3310,7 @@
           <p:cNvPr id="14" name="">
             <a:extLst xmlns:a="http://schemas.openxmlformats.org/drawingml/2006/main">
               <a:ext uri="{FF2B5EF4-FFF2-40B4-BE49-F238E27FC236}">
-                <a16:creationId xmlns:a16="http://schemas.microsoft.com/office/drawing/2014/main" id="{9AF63832-8AFC-4C85-A1D7-06E1B2B4B31B}"/>
+                <a16:creationId xmlns:a16="http://schemas.microsoft.com/office/drawing/2014/main" id="{899D329E-5128-454D-BFED-180D99BF4A04}"/>
               </a:ext>
             </a:extLst>
           </p:cNvPr>
@@ -3344,7 +3344,7 @@
           <p:cNvPr id="15" name="">
             <a:extLst xmlns:a="http://schemas.openxmlformats.org/drawingml/2006/main">
               <a:ext uri="{FF2B5EF4-FFF2-40B4-BE49-F238E27FC236}">
-                <a16:creationId xmlns:a16="http://schemas.microsoft.com/office/drawing/2014/main" id="{B2510152-4D09-450A-9A4B-705E0FFFEA13}"/>
+                <a16:creationId xmlns:a16="http://schemas.microsoft.com/office/drawing/2014/main" id="{C61CDE28-9693-451B-A32A-7FAFC2058ABD}"/>
               </a:ext>
             </a:extLst>
           </p:cNvPr>
@@ -3405,7 +3405,7 @@
           <p:cNvPr id="16" name="">
             <a:extLst xmlns:a="http://schemas.openxmlformats.org/drawingml/2006/main">
               <a:ext uri="{FF2B5EF4-FFF2-40B4-BE49-F238E27FC236}">
-                <a16:creationId xmlns:a16="http://schemas.microsoft.com/office/drawing/2014/main" id="{D4C1BFC4-E4AB-4E50-8594-BCC1981728BF}"/>
+                <a16:creationId xmlns:a16="http://schemas.microsoft.com/office/drawing/2014/main" id="{BC09F5C2-8133-4E80-94F1-03E11B026190}"/>
               </a:ext>
             </a:extLst>
           </p:cNvPr>
@@ -3456,7 +3456,7 @@
                 <a:ea typeface="IBM Plex Sans KR"/>
                 <a:cs typeface="IBM Plex Sans KR"/>
               </a:rPr>
-              <a:t>Excel에서 데이터 읽기</a:t>
+              <a:t>Excel에서 원본 읽기</a:t>
             </a:r>
           </a:p>
         </p:txBody>
@@ -3466,7 +3466,7 @@
           <p:cNvPr id="17" name="">
             <a:extLst xmlns:a="http://schemas.openxmlformats.org/drawingml/2006/main">
               <a:ext uri="{FF2B5EF4-FFF2-40B4-BE49-F238E27FC236}">
-                <a16:creationId xmlns:a16="http://schemas.microsoft.com/office/drawing/2014/main" id="{B86E8DCE-8F8E-4B1A-84BC-7B607FA7D848}"/>
+                <a16:creationId xmlns:a16="http://schemas.microsoft.com/office/drawing/2014/main" id="{A2C44AA0-B540-4D72-BA79-DD500395CD97}"/>
               </a:ext>
             </a:extLst>
           </p:cNvPr>
@@ -3517,7 +3517,7 @@
                 <a:ea typeface="IBM Plex Sans KR"/>
                 <a:cs typeface="IBM Plex Sans KR"/>
               </a:rPr>
-              <a:t>첫 줄의 머리글을 읽고</a:t>
+              <a:t>머리글과 60줄을 먼저 확인해야</a:t>
             </a:r>
           </a:p>
           <a:p xmlns:a="http://schemas.openxmlformats.org/drawingml/2006/main">
@@ -3544,7 +3544,7 @@
                 <a:ea typeface="IBM Plex Sans KR"/>
                 <a:cs typeface="IBM Plex Sans KR"/>
               </a:rPr>
-              <a:t>아래로 내려가 데이터 60줄을 확인해요</a:t>
+              <a:t>AI가 잘못 읽었을 때 알아챌 수 있어요</a:t>
             </a:r>
           </a:p>
         </p:txBody>
@@ -3554,7 +3554,7 @@
           <p:cNvPr id="18" name="">
             <a:extLst xmlns:a="http://schemas.openxmlformats.org/drawingml/2006/main">
               <a:ext uri="{FF2B5EF4-FFF2-40B4-BE49-F238E27FC236}">
-                <a16:creationId xmlns:a16="http://schemas.microsoft.com/office/drawing/2014/main" id="{ED23919A-AA0D-40B8-8A0A-0818C69BC829}"/>
+                <a16:creationId xmlns:a16="http://schemas.microsoft.com/office/drawing/2014/main" id="{273F64B8-FB0C-4A89-A669-4306B02A8C21}"/>
               </a:ext>
             </a:extLst>
           </p:cNvPr>
@@ -3613,7 +3613,7 @@
     </p:spTree>
     <p:extLst>
       <p:ext uri="{BB962C8B-B14F-4D97-AF65-F5344CB8AC3E}">
-        <p14:creationId xmlns:p14="http://schemas.microsoft.com/office/powerpoint/2010/main" val="896415248"/>
+        <p14:creationId xmlns:p14="http://schemas.microsoft.com/office/powerpoint/2010/main" val="726207963"/>
       </p:ext>
     </p:extLst>
   </p:cSld>
@@ -3644,7 +3644,7 @@
           <p:cNvPr id="11" name="">
             <a:extLst xmlns:a="http://schemas.openxmlformats.org/drawingml/2006/main">
               <a:ext uri="{FF2B5EF4-FFF2-40B4-BE49-F238E27FC236}">
-                <a16:creationId xmlns:a16="http://schemas.microsoft.com/office/drawing/2014/main" id="{D188CC53-5236-4C1B-900F-C97636674787}"/>
+                <a16:creationId xmlns:a16="http://schemas.microsoft.com/office/drawing/2014/main" id="{09484AF7-294A-4C22-AA46-9C24667E3611}"/>
               </a:ext>
             </a:extLst>
           </p:cNvPr>
@@ -3705,7 +3705,7 @@
           <p:cNvPr id="2" name="">
             <a:extLst xmlns:a="http://schemas.openxmlformats.org/drawingml/2006/main">
               <a:ext uri="{FF2B5EF4-FFF2-40B4-BE49-F238E27FC236}">
-                <a16:creationId xmlns:a16="http://schemas.microsoft.com/office/drawing/2014/main" id="{2EA8DD13-6B3E-48DC-8B88-9A18AC97118B}"/>
+                <a16:creationId xmlns:a16="http://schemas.microsoft.com/office/drawing/2014/main" id="{C9752057-ABD8-40FD-9D59-D887315EB0EA}"/>
               </a:ext>
             </a:extLst>
           </p:cNvPr>
@@ -3766,7 +3766,7 @@
           <p:cNvPr id="3" name="">
             <a:extLst xmlns:a="http://schemas.openxmlformats.org/drawingml/2006/main">
               <a:ext uri="{FF2B5EF4-FFF2-40B4-BE49-F238E27FC236}">
-                <a16:creationId xmlns:a16="http://schemas.microsoft.com/office/drawing/2014/main" id="{BB2F993D-A1A3-447E-B70A-3E4D7C4AF963}"/>
+                <a16:creationId xmlns:a16="http://schemas.microsoft.com/office/drawing/2014/main" id="{EE26763B-0790-4CDE-BDF0-57A3EC76E2D6}"/>
               </a:ext>
             </a:extLst>
           </p:cNvPr>
@@ -3827,7 +3827,7 @@
           <p:cNvPr id="4" name="">
             <a:extLst xmlns:a="http://schemas.openxmlformats.org/drawingml/2006/main">
               <a:ext uri="{FF2B5EF4-FFF2-40B4-BE49-F238E27FC236}">
-                <a16:creationId xmlns:a16="http://schemas.microsoft.com/office/drawing/2014/main" id="{EE4F40A3-9F3A-4FF7-80D0-93A0496B4875}"/>
+                <a16:creationId xmlns:a16="http://schemas.microsoft.com/office/drawing/2014/main" id="{DEAD5B95-3222-441C-8CF0-22B71E84BDEE}"/>
               </a:ext>
             </a:extLst>
           </p:cNvPr>
@@ -3859,7 +3859,7 @@
           <p:cNvPr id="5" name="">
             <a:extLst xmlns:a="http://schemas.openxmlformats.org/drawingml/2006/main">
               <a:ext uri="{FF2B5EF4-FFF2-40B4-BE49-F238E27FC236}">
-                <a16:creationId xmlns:a16="http://schemas.microsoft.com/office/drawing/2014/main" id="{A6AF5CD0-11CB-4840-9396-00E2E39A58B3}"/>
+                <a16:creationId xmlns:a16="http://schemas.microsoft.com/office/drawing/2014/main" id="{0515C576-E1F3-446A-9B56-73315B8AE980}"/>
               </a:ext>
             </a:extLst>
           </p:cNvPr>
@@ -3920,7 +3920,7 @@
           <p:cNvPr id="6" name="">
             <a:extLst xmlns:a="http://schemas.openxmlformats.org/drawingml/2006/main">
               <a:ext uri="{FF2B5EF4-FFF2-40B4-BE49-F238E27FC236}">
-                <a16:creationId xmlns:a16="http://schemas.microsoft.com/office/drawing/2014/main" id="{D96167B1-5E89-4927-B4F1-CC39DFF9DF09}"/>
+                <a16:creationId xmlns:a16="http://schemas.microsoft.com/office/drawing/2014/main" id="{EDE985EB-FF2E-4A15-A171-EBF4E2731C5B}"/>
               </a:ext>
             </a:extLst>
           </p:cNvPr>
@@ -3971,7 +3971,7 @@
                 <a:ea typeface="IBM Plex Sans KR"/>
                 <a:cs typeface="IBM Plex Sans KR"/>
               </a:rPr>
-              <a:t>교과서 04-1 · 11쪽</a:t>
+              <a:t>교과서 04-1 · 14쪽</a:t>
             </a:r>
           </a:p>
         </p:txBody>
@@ -3981,7 +3981,7 @@
           <p:cNvPr id="7" name="">
             <a:extLst xmlns:a="http://schemas.openxmlformats.org/drawingml/2006/main">
               <a:ext uri="{FF2B5EF4-FFF2-40B4-BE49-F238E27FC236}">
-                <a16:creationId xmlns:a16="http://schemas.microsoft.com/office/drawing/2014/main" id="{18417706-9099-4CB2-B9C0-CBB9EA8F9908}"/>
+                <a16:creationId xmlns:a16="http://schemas.microsoft.com/office/drawing/2014/main" id="{C55EBBED-0686-41D9-8F94-60B178F316AE}"/>
               </a:ext>
             </a:extLst>
           </p:cNvPr>
@@ -4373,7 +4373,7 @@
           <p:cNvPr id="9" name="">
             <a:extLst xmlns:a="http://schemas.openxmlformats.org/drawingml/2006/main">
               <a:ext uri="{FF2B5EF4-FFF2-40B4-BE49-F238E27FC236}">
-                <a16:creationId xmlns:a16="http://schemas.microsoft.com/office/drawing/2014/main" id="{9D3800CA-F13B-49F2-B911-40C31673D55B}"/>
+                <a16:creationId xmlns:a16="http://schemas.microsoft.com/office/drawing/2014/main" id="{E9C40F6E-92DD-49BE-A241-D920BEFF82ED}"/>
               </a:ext>
             </a:extLst>
           </p:cNvPr>
@@ -4424,7 +4424,7 @@
                 <a:ea typeface="IBM Plex Sans KR"/>
                 <a:cs typeface="IBM Plex Sans KR"/>
               </a:rPr>
-              <a:t>확인 · 머리글 3개 · 데이터 60줄 · 파일은 고치지 않기</a:t>
+              <a:t>확인 · 머리글은 1행 · 실제 데이터는 2~61행, 모두 60줄</a:t>
             </a:r>
           </a:p>
         </p:txBody>
@@ -4434,7 +4434,7 @@
           <p:cNvPr id="10" name="">
             <a:extLst xmlns:a="http://schemas.openxmlformats.org/drawingml/2006/main">
               <a:ext uri="{FF2B5EF4-FFF2-40B4-BE49-F238E27FC236}">
-                <a16:creationId xmlns:a16="http://schemas.microsoft.com/office/drawing/2014/main" id="{4D4E157E-1E26-479D-84A9-AB5D78327367}"/>
+                <a16:creationId xmlns:a16="http://schemas.microsoft.com/office/drawing/2014/main" id="{4D19D085-49CF-4A49-A3BE-4DEE52814FAF}"/>
               </a:ext>
             </a:extLst>
           </p:cNvPr>
@@ -4493,7 +4493,7 @@
     </p:spTree>
     <p:extLst>
       <p:ext uri="{BB962C8B-B14F-4D97-AF65-F5344CB8AC3E}">
-        <p14:creationId xmlns:p14="http://schemas.microsoft.com/office/powerpoint/2010/main" val="462258677"/>
+        <p14:creationId xmlns:p14="http://schemas.microsoft.com/office/powerpoint/2010/main" val="817270476"/>
       </p:ext>
     </p:extLst>
   </p:cSld>
@@ -4524,7 +4524,7 @@
           <p:cNvPr id="10" name="">
             <a:extLst xmlns:a="http://schemas.openxmlformats.org/drawingml/2006/main">
               <a:ext uri="{FF2B5EF4-FFF2-40B4-BE49-F238E27FC236}">
-                <a16:creationId xmlns:a16="http://schemas.microsoft.com/office/drawing/2014/main" id="{D0B5368A-D9BF-4118-AA91-86EA874F36A2}"/>
+                <a16:creationId xmlns:a16="http://schemas.microsoft.com/office/drawing/2014/main" id="{736B87D1-FAE2-4DEC-AAC8-7CD7999F47D3}"/>
               </a:ext>
             </a:extLst>
           </p:cNvPr>
@@ -4585,7 +4585,7 @@
           <p:cNvPr id="2" name="">
             <a:extLst xmlns:a="http://schemas.openxmlformats.org/drawingml/2006/main">
               <a:ext uri="{FF2B5EF4-FFF2-40B4-BE49-F238E27FC236}">
-                <a16:creationId xmlns:a16="http://schemas.microsoft.com/office/drawing/2014/main" id="{FA2E5AE3-E38B-4082-A7CC-EF98D167B893}"/>
+                <a16:creationId xmlns:a16="http://schemas.microsoft.com/office/drawing/2014/main" id="{631AB91E-BDD3-445A-927D-0A8D88B8F576}"/>
               </a:ext>
             </a:extLst>
           </p:cNvPr>
@@ -4646,7 +4646,7 @@
           <p:cNvPr id="3" name="">
             <a:extLst xmlns:a="http://schemas.openxmlformats.org/drawingml/2006/main">
               <a:ext uri="{FF2B5EF4-FFF2-40B4-BE49-F238E27FC236}">
-                <a16:creationId xmlns:a16="http://schemas.microsoft.com/office/drawing/2014/main" id="{7E3F0C8B-D1F9-4B46-843F-A0D121FF9A7A}"/>
+                <a16:creationId xmlns:a16="http://schemas.microsoft.com/office/drawing/2014/main" id="{B83FBF7A-4A72-485E-A5CB-0A5624A2EE0A}"/>
               </a:ext>
             </a:extLst>
           </p:cNvPr>
@@ -4707,7 +4707,7 @@
           <p:cNvPr id="4" name="">
             <a:extLst xmlns:a="http://schemas.openxmlformats.org/drawingml/2006/main">
               <a:ext uri="{FF2B5EF4-FFF2-40B4-BE49-F238E27FC236}">
-                <a16:creationId xmlns:a16="http://schemas.microsoft.com/office/drawing/2014/main" id="{8CCE84B9-950A-4604-9398-EBCEE56B96FF}"/>
+                <a16:creationId xmlns:a16="http://schemas.microsoft.com/office/drawing/2014/main" id="{2C010801-D454-43C5-BC89-4AE794D7C142}"/>
               </a:ext>
             </a:extLst>
           </p:cNvPr>
@@ -4739,7 +4739,7 @@
           <p:cNvPr id="5" name="">
             <a:extLst xmlns:a="http://schemas.openxmlformats.org/drawingml/2006/main">
               <a:ext uri="{FF2B5EF4-FFF2-40B4-BE49-F238E27FC236}">
-                <a16:creationId xmlns:a16="http://schemas.microsoft.com/office/drawing/2014/main" id="{BC1BFB3B-263F-4FEC-8F09-408208460523}"/>
+                <a16:creationId xmlns:a16="http://schemas.microsoft.com/office/drawing/2014/main" id="{6608A7A6-56A6-4E45-8897-E3DB70983DE4}"/>
               </a:ext>
             </a:extLst>
           </p:cNvPr>
@@ -4800,7 +4800,7 @@
           <p:cNvPr id="6" name="">
             <a:extLst xmlns:a="http://schemas.openxmlformats.org/drawingml/2006/main">
               <a:ext uri="{FF2B5EF4-FFF2-40B4-BE49-F238E27FC236}">
-                <a16:creationId xmlns:a16="http://schemas.microsoft.com/office/drawing/2014/main" id="{C436BF60-D6EC-452D-AF3E-300DDA5995E0}"/>
+                <a16:creationId xmlns:a16="http://schemas.microsoft.com/office/drawing/2014/main" id="{0B2F5FC0-0847-4B0F-924F-3F29B8598720}"/>
               </a:ext>
             </a:extLst>
           </p:cNvPr>
@@ -4851,7 +4851,7 @@
                 <a:ea typeface="IBM Plex Sans KR"/>
                 <a:cs typeface="IBM Plex Sans KR"/>
               </a:rPr>
-              <a:t>교과서 04-1 · 12쪽</a:t>
+              <a:t>교과서 04-1 · 15쪽</a:t>
             </a:r>
           </a:p>
         </p:txBody>
@@ -4861,7 +4861,7 @@
           <p:cNvPr id="7" name="">
             <a:extLst xmlns:a="http://schemas.openxmlformats.org/drawingml/2006/main">
               <a:ext uri="{FF2B5EF4-FFF2-40B4-BE49-F238E27FC236}">
-                <a16:creationId xmlns:a16="http://schemas.microsoft.com/office/drawing/2014/main" id="{C2F95A4D-9971-4791-9F2D-EC2A166C9A23}"/>
+                <a16:creationId xmlns:a16="http://schemas.microsoft.com/office/drawing/2014/main" id="{DC8D91F5-9D64-4220-B0BE-64E4A3FB55D0}"/>
               </a:ext>
             </a:extLst>
           </p:cNvPr>
@@ -5253,7 +5253,7 @@
           <p:cNvPr id="9" name="">
             <a:extLst xmlns:a="http://schemas.openxmlformats.org/drawingml/2006/main">
               <a:ext uri="{FF2B5EF4-FFF2-40B4-BE49-F238E27FC236}">
-                <a16:creationId xmlns:a16="http://schemas.microsoft.com/office/drawing/2014/main" id="{73525066-A5CA-4B05-B999-440CC84922D1}"/>
+                <a16:creationId xmlns:a16="http://schemas.microsoft.com/office/drawing/2014/main" id="{561F71BF-1926-4329-9000-593C0FBE96D9}"/>
               </a:ext>
             </a:extLst>
           </p:cNvPr>
@@ -5312,7 +5312,7 @@
     </p:spTree>
     <p:extLst>
       <p:ext uri="{BB962C8B-B14F-4D97-AF65-F5344CB8AC3E}">
-        <p14:creationId xmlns:p14="http://schemas.microsoft.com/office/powerpoint/2010/main" val="1884203708"/>
+        <p14:creationId xmlns:p14="http://schemas.microsoft.com/office/powerpoint/2010/main" val="980530754"/>
       </p:ext>
     </p:extLst>
   </p:cSld>
@@ -5343,7 +5343,7 @@
           <p:cNvPr id="15" name="">
             <a:extLst xmlns:a="http://schemas.openxmlformats.org/drawingml/2006/main">
               <a:ext uri="{FF2B5EF4-FFF2-40B4-BE49-F238E27FC236}">
-                <a16:creationId xmlns:a16="http://schemas.microsoft.com/office/drawing/2014/main" id="{D7602865-843A-4A8E-8479-82A614D31612}"/>
+                <a16:creationId xmlns:a16="http://schemas.microsoft.com/office/drawing/2014/main" id="{205ACA85-E304-4305-A7E1-B10F64F6768F}"/>
               </a:ext>
             </a:extLst>
           </p:cNvPr>
@@ -5404,7 +5404,7 @@
           <p:cNvPr id="2" name="">
             <a:extLst xmlns:a="http://schemas.openxmlformats.org/drawingml/2006/main">
               <a:ext uri="{FF2B5EF4-FFF2-40B4-BE49-F238E27FC236}">
-                <a16:creationId xmlns:a16="http://schemas.microsoft.com/office/drawing/2014/main" id="{69C011CF-AF3E-46DB-A95D-83259B6130D1}"/>
+                <a16:creationId xmlns:a16="http://schemas.microsoft.com/office/drawing/2014/main" id="{4EE5F179-C6A9-49B1-B683-D1FFD3FEC6DB}"/>
               </a:ext>
             </a:extLst>
           </p:cNvPr>
@@ -5465,7 +5465,7 @@
           <p:cNvPr id="3" name="">
             <a:extLst xmlns:a="http://schemas.openxmlformats.org/drawingml/2006/main">
               <a:ext uri="{FF2B5EF4-FFF2-40B4-BE49-F238E27FC236}">
-                <a16:creationId xmlns:a16="http://schemas.microsoft.com/office/drawing/2014/main" id="{091577FB-E652-4FC9-937C-CF49201EFA14}"/>
+                <a16:creationId xmlns:a16="http://schemas.microsoft.com/office/drawing/2014/main" id="{4F24B150-A81E-48A7-B6FC-BE157E07899C}"/>
               </a:ext>
             </a:extLst>
           </p:cNvPr>
@@ -5526,7 +5526,7 @@
           <p:cNvPr id="4" name="">
             <a:extLst xmlns:a="http://schemas.openxmlformats.org/drawingml/2006/main">
               <a:ext uri="{FF2B5EF4-FFF2-40B4-BE49-F238E27FC236}">
-                <a16:creationId xmlns:a16="http://schemas.microsoft.com/office/drawing/2014/main" id="{B2382BFB-7253-4E45-B615-CCCA8B3FE40D}"/>
+                <a16:creationId xmlns:a16="http://schemas.microsoft.com/office/drawing/2014/main" id="{17E2976B-AEC6-46BA-AC22-7D923C09B57B}"/>
               </a:ext>
             </a:extLst>
           </p:cNvPr>
@@ -5558,7 +5558,7 @@
           <p:cNvPr id="5" name="">
             <a:extLst xmlns:a="http://schemas.openxmlformats.org/drawingml/2006/main">
               <a:ext uri="{FF2B5EF4-FFF2-40B4-BE49-F238E27FC236}">
-                <a16:creationId xmlns:a16="http://schemas.microsoft.com/office/drawing/2014/main" id="{CAE4EC6C-90DA-4C8C-AC97-646B8D5FE9B3}"/>
+                <a16:creationId xmlns:a16="http://schemas.microsoft.com/office/drawing/2014/main" id="{6B287A02-D8DA-4A20-B16A-54632E1FD3C0}"/>
               </a:ext>
             </a:extLst>
           </p:cNvPr>
@@ -5619,7 +5619,7 @@
           <p:cNvPr id="6" name="">
             <a:extLst xmlns:a="http://schemas.openxmlformats.org/drawingml/2006/main">
               <a:ext uri="{FF2B5EF4-FFF2-40B4-BE49-F238E27FC236}">
-                <a16:creationId xmlns:a16="http://schemas.microsoft.com/office/drawing/2014/main" id="{BF100627-178F-4346-BABF-10F8BA360D00}"/>
+                <a16:creationId xmlns:a16="http://schemas.microsoft.com/office/drawing/2014/main" id="{483EE21D-A428-42DD-954D-A804DE2E12CA}"/>
               </a:ext>
             </a:extLst>
           </p:cNvPr>
@@ -5670,7 +5670,7 @@
                 <a:ea typeface="IBM Plex Sans KR"/>
                 <a:cs typeface="IBM Plex Sans KR"/>
               </a:rPr>
-              <a:t>교과서 04-1 · 13쪽</a:t>
+              <a:t>교과서 04-1 · 16쪽</a:t>
             </a:r>
           </a:p>
         </p:txBody>
@@ -5680,7 +5680,7 @@
           <p:cNvPr id="7" name="">
             <a:extLst xmlns:a="http://schemas.openxmlformats.org/drawingml/2006/main">
               <a:ext uri="{FF2B5EF4-FFF2-40B4-BE49-F238E27FC236}">
-                <a16:creationId xmlns:a16="http://schemas.microsoft.com/office/drawing/2014/main" id="{EB77A8C1-7422-4C86-92D4-3AC0FF938EC1}"/>
+                <a16:creationId xmlns:a16="http://schemas.microsoft.com/office/drawing/2014/main" id="{89C21181-4F7F-4B85-BFA2-372C45CFAE98}"/>
               </a:ext>
             </a:extLst>
           </p:cNvPr>
@@ -5741,7 +5741,7 @@
           <p:cNvPr id="8" name="">
             <a:extLst xmlns:a="http://schemas.openxmlformats.org/drawingml/2006/main">
               <a:ext uri="{FF2B5EF4-FFF2-40B4-BE49-F238E27FC236}">
-                <a16:creationId xmlns:a16="http://schemas.microsoft.com/office/drawing/2014/main" id="{619BB9DC-CE6F-4B31-B081-8944E44C8762}"/>
+                <a16:creationId xmlns:a16="http://schemas.microsoft.com/office/drawing/2014/main" id="{90175BF9-B08D-4925-890C-96AA23AC43CE}"/>
               </a:ext>
             </a:extLst>
           </p:cNvPr>
@@ -5808,7 +5808,7 @@
           <p:cNvPr id="9" name="">
             <a:extLst xmlns:a="http://schemas.openxmlformats.org/drawingml/2006/main">
               <a:ext uri="{FF2B5EF4-FFF2-40B4-BE49-F238E27FC236}">
-                <a16:creationId xmlns:a16="http://schemas.microsoft.com/office/drawing/2014/main" id="{84945BF5-A40F-4356-954C-3F4A3D24003D}"/>
+                <a16:creationId xmlns:a16="http://schemas.microsoft.com/office/drawing/2014/main" id="{B203E10B-F363-439D-8938-A63E3E5C42FF}"/>
               </a:ext>
             </a:extLst>
           </p:cNvPr>
@@ -5954,7 +5954,7 @@
           <p:cNvPr id="10" name="">
             <a:extLst xmlns:a="http://schemas.openxmlformats.org/drawingml/2006/main">
               <a:ext uri="{FF2B5EF4-FFF2-40B4-BE49-F238E27FC236}">
-                <a16:creationId xmlns:a16="http://schemas.microsoft.com/office/drawing/2014/main" id="{85324ED1-DED9-4C6E-BA1B-48D210FE465C}"/>
+                <a16:creationId xmlns:a16="http://schemas.microsoft.com/office/drawing/2014/main" id="{C307D531-F994-474D-BAA4-7B9AF50B7162}"/>
               </a:ext>
             </a:extLst>
           </p:cNvPr>
@@ -6021,7 +6021,7 @@
           <p:cNvPr id="11" name="">
             <a:extLst xmlns:a="http://schemas.openxmlformats.org/drawingml/2006/main">
               <a:ext uri="{FF2B5EF4-FFF2-40B4-BE49-F238E27FC236}">
-                <a16:creationId xmlns:a16="http://schemas.microsoft.com/office/drawing/2014/main" id="{B6188D04-5AA0-4C26-B531-0D025963E24B}"/>
+                <a16:creationId xmlns:a16="http://schemas.microsoft.com/office/drawing/2014/main" id="{30422C91-6EE3-42A4-ADB7-B964A7415E67}"/>
               </a:ext>
             </a:extLst>
           </p:cNvPr>
@@ -6167,7 +6167,7 @@
           <p:cNvPr id="12" name="">
             <a:extLst xmlns:a="http://schemas.openxmlformats.org/drawingml/2006/main">
               <a:ext uri="{FF2B5EF4-FFF2-40B4-BE49-F238E27FC236}">
-                <a16:creationId xmlns:a16="http://schemas.microsoft.com/office/drawing/2014/main" id="{9A478A2C-D25A-4B06-A5A0-6AE31F3DBF4F}"/>
+                <a16:creationId xmlns:a16="http://schemas.microsoft.com/office/drawing/2014/main" id="{88CE1A3E-13AD-49C3-9CE8-AEA15FA7AC3F}"/>
               </a:ext>
             </a:extLst>
           </p:cNvPr>
@@ -6234,7 +6234,7 @@
           <p:cNvPr id="13" name="">
             <a:extLst xmlns:a="http://schemas.openxmlformats.org/drawingml/2006/main">
               <a:ext uri="{FF2B5EF4-FFF2-40B4-BE49-F238E27FC236}">
-                <a16:creationId xmlns:a16="http://schemas.microsoft.com/office/drawing/2014/main" id="{2EA96F63-13CA-484A-AF3A-1762A7CE3E6E}"/>
+                <a16:creationId xmlns:a16="http://schemas.microsoft.com/office/drawing/2014/main" id="{83B2E533-EAB5-4EC2-BE25-3E73F3A4FAEF}"/>
               </a:ext>
             </a:extLst>
           </p:cNvPr>
@@ -6434,7 +6434,7 @@
           <p:cNvPr id="14" name="">
             <a:extLst xmlns:a="http://schemas.openxmlformats.org/drawingml/2006/main">
               <a:ext uri="{FF2B5EF4-FFF2-40B4-BE49-F238E27FC236}">
-                <a16:creationId xmlns:a16="http://schemas.microsoft.com/office/drawing/2014/main" id="{B29D1A7B-ED92-4EC4-A613-8169FA7099ED}"/>
+                <a16:creationId xmlns:a16="http://schemas.microsoft.com/office/drawing/2014/main" id="{FB0BF6B2-0A30-4F0E-BB01-E02BD2D79E9F}"/>
               </a:ext>
             </a:extLst>
           </p:cNvPr>
@@ -6485,7 +6485,7 @@
                 <a:ea typeface="IBM Plex Sans KR"/>
                 <a:cs typeface="IBM Plex Sans KR"/>
               </a:rPr>
-              <a:t>각 요청을 복사해 보내고, 답을 확인한 뒤 다음 요청으로 넘어간다</a:t>
+              <a:t>1번은 원본 확인, 2번은 추천과 이유, 3번은 실제 제작</a:t>
             </a:r>
           </a:p>
         </p:txBody>
@@ -6493,7 +6493,7 @@
     </p:spTree>
     <p:extLst>
       <p:ext uri="{BB962C8B-B14F-4D97-AF65-F5344CB8AC3E}">
-        <p14:creationId xmlns:p14="http://schemas.microsoft.com/office/powerpoint/2010/main" val="387777017"/>
+        <p14:creationId xmlns:p14="http://schemas.microsoft.com/office/powerpoint/2010/main" val="1070307689"/>
       </p:ext>
     </p:extLst>
   </p:cSld>
@@ -6524,7 +6524,7 @@
           <p:cNvPr id="24" name="">
             <a:extLst xmlns:a="http://schemas.openxmlformats.org/drawingml/2006/main">
               <a:ext uri="{FF2B5EF4-FFF2-40B4-BE49-F238E27FC236}">
-                <a16:creationId xmlns:a16="http://schemas.microsoft.com/office/drawing/2014/main" id="{2E3A40F6-CE42-4EB8-8588-759B8A5A637B}"/>
+                <a16:creationId xmlns:a16="http://schemas.microsoft.com/office/drawing/2014/main" id="{676510FB-C76D-4019-8FD6-E1C40854A688}"/>
               </a:ext>
             </a:extLst>
           </p:cNvPr>
@@ -6585,7 +6585,7 @@
           <p:cNvPr id="2" name="">
             <a:extLst xmlns:a="http://schemas.openxmlformats.org/drawingml/2006/main">
               <a:ext uri="{FF2B5EF4-FFF2-40B4-BE49-F238E27FC236}">
-                <a16:creationId xmlns:a16="http://schemas.microsoft.com/office/drawing/2014/main" id="{D93B49A2-7DA7-48C3-81EF-4F2DAC44E973}"/>
+                <a16:creationId xmlns:a16="http://schemas.microsoft.com/office/drawing/2014/main" id="{D7D4E023-645E-47B2-AC56-8660ABAC3630}"/>
               </a:ext>
             </a:extLst>
           </p:cNvPr>
@@ -6646,7 +6646,7 @@
           <p:cNvPr id="3" name="">
             <a:extLst xmlns:a="http://schemas.openxmlformats.org/drawingml/2006/main">
               <a:ext uri="{FF2B5EF4-FFF2-40B4-BE49-F238E27FC236}">
-                <a16:creationId xmlns:a16="http://schemas.microsoft.com/office/drawing/2014/main" id="{138AAE51-A2EB-470B-9B40-EDC1D8E2E402}"/>
+                <a16:creationId xmlns:a16="http://schemas.microsoft.com/office/drawing/2014/main" id="{354CD4E2-0466-4414-89B4-724F106C000B}"/>
               </a:ext>
             </a:extLst>
           </p:cNvPr>
@@ -6707,7 +6707,7 @@
           <p:cNvPr id="4" name="">
             <a:extLst xmlns:a="http://schemas.openxmlformats.org/drawingml/2006/main">
               <a:ext uri="{FF2B5EF4-FFF2-40B4-BE49-F238E27FC236}">
-                <a16:creationId xmlns:a16="http://schemas.microsoft.com/office/drawing/2014/main" id="{FDBEFE15-7BD1-467D-9E34-45868A9A8BEA}"/>
+                <a16:creationId xmlns:a16="http://schemas.microsoft.com/office/drawing/2014/main" id="{E151EE0B-A251-403F-B112-DFC0EB049C3F}"/>
               </a:ext>
             </a:extLst>
           </p:cNvPr>
@@ -6739,7 +6739,7 @@
           <p:cNvPr id="5" name="">
             <a:extLst xmlns:a="http://schemas.openxmlformats.org/drawingml/2006/main">
               <a:ext uri="{FF2B5EF4-FFF2-40B4-BE49-F238E27FC236}">
-                <a16:creationId xmlns:a16="http://schemas.microsoft.com/office/drawing/2014/main" id="{9B993989-F309-4BA1-B4F8-1993474A7801}"/>
+                <a16:creationId xmlns:a16="http://schemas.microsoft.com/office/drawing/2014/main" id="{3FE9F65E-260D-4C50-8BAD-436A7A94E1D6}"/>
               </a:ext>
             </a:extLst>
           </p:cNvPr>
@@ -6800,7 +6800,7 @@
           <p:cNvPr id="6" name="">
             <a:extLst xmlns:a="http://schemas.openxmlformats.org/drawingml/2006/main">
               <a:ext uri="{FF2B5EF4-FFF2-40B4-BE49-F238E27FC236}">
-                <a16:creationId xmlns:a16="http://schemas.microsoft.com/office/drawing/2014/main" id="{C85E2C5A-A224-4209-9CB6-CDB7E8F3DDB0}"/>
+                <a16:creationId xmlns:a16="http://schemas.microsoft.com/office/drawing/2014/main" id="{3A25ED94-0BF3-422B-9BF1-547073AF047D}"/>
               </a:ext>
             </a:extLst>
           </p:cNvPr>
@@ -6851,7 +6851,7 @@
                 <a:ea typeface="IBM Plex Sans KR"/>
                 <a:cs typeface="IBM Plex Sans KR"/>
               </a:rPr>
-              <a:t>교과서 04-1 · 14쪽</a:t>
+              <a:t>교과서 04-1 · 17쪽</a:t>
             </a:r>
           </a:p>
         </p:txBody>
@@ -6861,7 +6861,7 @@
           <p:cNvPr id="7" name="">
             <a:extLst xmlns:a="http://schemas.openxmlformats.org/drawingml/2006/main">
               <a:ext uri="{FF2B5EF4-FFF2-40B4-BE49-F238E27FC236}">
-                <a16:creationId xmlns:a16="http://schemas.microsoft.com/office/drawing/2014/main" id="{7A0889C5-730E-453D-A0D5-A0114A57FD0A}"/>
+                <a16:creationId xmlns:a16="http://schemas.microsoft.com/office/drawing/2014/main" id="{1971CFD2-2D83-472B-A771-5D1F12EE3B34}"/>
               </a:ext>
             </a:extLst>
           </p:cNvPr>
@@ -6922,7 +6922,7 @@
           <p:cNvPr id="8" name="">
             <a:extLst xmlns:a="http://schemas.openxmlformats.org/drawingml/2006/main">
               <a:ext uri="{FF2B5EF4-FFF2-40B4-BE49-F238E27FC236}">
-                <a16:creationId xmlns:a16="http://schemas.microsoft.com/office/drawing/2014/main" id="{C21CC781-7B13-4127-8CC5-924EFE64084D}"/>
+                <a16:creationId xmlns:a16="http://schemas.microsoft.com/office/drawing/2014/main" id="{56E521DD-2242-4227-8D00-1F881FBBF68F}"/>
               </a:ext>
             </a:extLst>
           </p:cNvPr>
@@ -6989,7 +6989,7 @@
           <p:cNvPr id="9" name="">
             <a:extLst xmlns:a="http://schemas.openxmlformats.org/drawingml/2006/main">
               <a:ext uri="{FF2B5EF4-FFF2-40B4-BE49-F238E27FC236}">
-                <a16:creationId xmlns:a16="http://schemas.microsoft.com/office/drawing/2014/main" id="{796A1C03-3159-446B-90C6-75967B0E34A4}"/>
+                <a16:creationId xmlns:a16="http://schemas.microsoft.com/office/drawing/2014/main" id="{7FF76D41-0602-479D-827B-982F9D50A17A}"/>
               </a:ext>
             </a:extLst>
           </p:cNvPr>
@@ -7050,7 +7050,7 @@
           <p:cNvPr id="10" name="">
             <a:extLst xmlns:a="http://schemas.openxmlformats.org/drawingml/2006/main">
               <a:ext uri="{FF2B5EF4-FFF2-40B4-BE49-F238E27FC236}">
-                <a16:creationId xmlns:a16="http://schemas.microsoft.com/office/drawing/2014/main" id="{C4641F68-8A8C-468D-BC4E-0BE19BDF6301}"/>
+                <a16:creationId xmlns:a16="http://schemas.microsoft.com/office/drawing/2014/main" id="{73FEF6C1-2845-488B-BE24-FECFC441F77D}"/>
               </a:ext>
             </a:extLst>
           </p:cNvPr>
@@ -7111,7 +7111,7 @@
           <p:cNvPr id="11" name="">
             <a:extLst xmlns:a="http://schemas.openxmlformats.org/drawingml/2006/main">
               <a:ext uri="{FF2B5EF4-FFF2-40B4-BE49-F238E27FC236}">
-                <a16:creationId xmlns:a16="http://schemas.microsoft.com/office/drawing/2014/main" id="{301FD1FC-AEBA-4184-91CA-2EA5F4E59CB5}"/>
+                <a16:creationId xmlns:a16="http://schemas.microsoft.com/office/drawing/2014/main" id="{6E2874A6-BBD9-42FA-8F5D-3BA47F8F9E50}"/>
               </a:ext>
             </a:extLst>
           </p:cNvPr>
@@ -7141,7 +7141,7 @@
           <p:cNvPr id="12" name="">
             <a:extLst xmlns:a="http://schemas.openxmlformats.org/drawingml/2006/main">
               <a:ext uri="{FF2B5EF4-FFF2-40B4-BE49-F238E27FC236}">
-                <a16:creationId xmlns:a16="http://schemas.microsoft.com/office/drawing/2014/main" id="{B3C7BBC9-2323-41A6-BC7E-D6C5F4BABCB3}"/>
+                <a16:creationId xmlns:a16="http://schemas.microsoft.com/office/drawing/2014/main" id="{9F0A4A2E-EFA7-41ED-9DDF-322928F0B371}"/>
               </a:ext>
             </a:extLst>
           </p:cNvPr>
@@ -7208,7 +7208,7 @@
           <p:cNvPr id="13" name="">
             <a:extLst xmlns:a="http://schemas.openxmlformats.org/drawingml/2006/main">
               <a:ext uri="{FF2B5EF4-FFF2-40B4-BE49-F238E27FC236}">
-                <a16:creationId xmlns:a16="http://schemas.microsoft.com/office/drawing/2014/main" id="{3A3C1AFC-0C79-40F8-9A86-21E5BCEE3EF4}"/>
+                <a16:creationId xmlns:a16="http://schemas.microsoft.com/office/drawing/2014/main" id="{9FEE61D6-940B-44C5-B1BB-30E7D170394B}"/>
               </a:ext>
             </a:extLst>
           </p:cNvPr>
@@ -7269,7 +7269,7 @@
           <p:cNvPr id="14" name="">
             <a:extLst xmlns:a="http://schemas.openxmlformats.org/drawingml/2006/main">
               <a:ext uri="{FF2B5EF4-FFF2-40B4-BE49-F238E27FC236}">
-                <a16:creationId xmlns:a16="http://schemas.microsoft.com/office/drawing/2014/main" id="{F506EDBC-87D2-4083-92B4-7B06F2A0C0B9}"/>
+                <a16:creationId xmlns:a16="http://schemas.microsoft.com/office/drawing/2014/main" id="{E78167E7-6B14-4481-B5BE-CBFF74CACB5C}"/>
               </a:ext>
             </a:extLst>
           </p:cNvPr>
@@ -7330,7 +7330,7 @@
           <p:cNvPr id="15" name="">
             <a:extLst xmlns:a="http://schemas.openxmlformats.org/drawingml/2006/main">
               <a:ext uri="{FF2B5EF4-FFF2-40B4-BE49-F238E27FC236}">
-                <a16:creationId xmlns:a16="http://schemas.microsoft.com/office/drawing/2014/main" id="{11F37EE6-DED2-4360-9C4B-010345CBAAE6}"/>
+                <a16:creationId xmlns:a16="http://schemas.microsoft.com/office/drawing/2014/main" id="{2F6DB6A9-BEF2-414C-BBB6-1C5792AAAE60}"/>
               </a:ext>
             </a:extLst>
           </p:cNvPr>
@@ -7360,7 +7360,7 @@
           <p:cNvPr id="16" name="">
             <a:extLst xmlns:a="http://schemas.openxmlformats.org/drawingml/2006/main">
               <a:ext uri="{FF2B5EF4-FFF2-40B4-BE49-F238E27FC236}">
-                <a16:creationId xmlns:a16="http://schemas.microsoft.com/office/drawing/2014/main" id="{CDB464A8-6423-4D4B-9C22-A003E32B5641}"/>
+                <a16:creationId xmlns:a16="http://schemas.microsoft.com/office/drawing/2014/main" id="{6654784D-EBDE-4CC5-A0B2-A1AE9347CA73}"/>
               </a:ext>
             </a:extLst>
           </p:cNvPr>
@@ -7427,7 +7427,7 @@
           <p:cNvPr id="17" name="">
             <a:extLst xmlns:a="http://schemas.openxmlformats.org/drawingml/2006/main">
               <a:ext uri="{FF2B5EF4-FFF2-40B4-BE49-F238E27FC236}">
-                <a16:creationId xmlns:a16="http://schemas.microsoft.com/office/drawing/2014/main" id="{39310D7E-7604-4C82-8EA2-28732695516E}"/>
+                <a16:creationId xmlns:a16="http://schemas.microsoft.com/office/drawing/2014/main" id="{78568ED0-3D00-4A47-98DA-77F00F6193ED}"/>
               </a:ext>
             </a:extLst>
           </p:cNvPr>
@@ -7488,7 +7488,7 @@
           <p:cNvPr id="18" name="">
             <a:extLst xmlns:a="http://schemas.openxmlformats.org/drawingml/2006/main">
               <a:ext uri="{FF2B5EF4-FFF2-40B4-BE49-F238E27FC236}">
-                <a16:creationId xmlns:a16="http://schemas.microsoft.com/office/drawing/2014/main" id="{1484275A-5901-4637-A7EA-8723F055DB59}"/>
+                <a16:creationId xmlns:a16="http://schemas.microsoft.com/office/drawing/2014/main" id="{BA9AF15C-0935-4C5B-9387-42DB8BEE277A}"/>
               </a:ext>
             </a:extLst>
           </p:cNvPr>
@@ -7549,7 +7549,7 @@
           <p:cNvPr id="19" name="">
             <a:extLst xmlns:a="http://schemas.openxmlformats.org/drawingml/2006/main">
               <a:ext uri="{FF2B5EF4-FFF2-40B4-BE49-F238E27FC236}">
-                <a16:creationId xmlns:a16="http://schemas.microsoft.com/office/drawing/2014/main" id="{52656D10-D6A6-4D3A-81E3-EDFF202A80B2}"/>
+                <a16:creationId xmlns:a16="http://schemas.microsoft.com/office/drawing/2014/main" id="{4F8E5987-6466-4BB1-AFDC-E57B4B7BFD58}"/>
               </a:ext>
             </a:extLst>
           </p:cNvPr>
@@ -7579,7 +7579,7 @@
           <p:cNvPr id="20" name="">
             <a:extLst xmlns:a="http://schemas.openxmlformats.org/drawingml/2006/main">
               <a:ext uri="{FF2B5EF4-FFF2-40B4-BE49-F238E27FC236}">
-                <a16:creationId xmlns:a16="http://schemas.microsoft.com/office/drawing/2014/main" id="{A8BC0F23-BF09-420E-BD57-D891EC7241ED}"/>
+                <a16:creationId xmlns:a16="http://schemas.microsoft.com/office/drawing/2014/main" id="{4C8A3445-D0BD-431E-B75C-06B9D4688FDE}"/>
               </a:ext>
             </a:extLst>
           </p:cNvPr>
@@ -7646,7 +7646,7 @@
           <p:cNvPr id="21" name="">
             <a:extLst xmlns:a="http://schemas.openxmlformats.org/drawingml/2006/main">
               <a:ext uri="{FF2B5EF4-FFF2-40B4-BE49-F238E27FC236}">
-                <a16:creationId xmlns:a16="http://schemas.microsoft.com/office/drawing/2014/main" id="{DE77A6F2-1C9A-4072-B859-3A7791A251B6}"/>
+                <a16:creationId xmlns:a16="http://schemas.microsoft.com/office/drawing/2014/main" id="{A65AE1FC-97F8-44F2-8835-5CE793097B17}"/>
               </a:ext>
             </a:extLst>
           </p:cNvPr>
@@ -7707,7 +7707,7 @@
           <p:cNvPr id="22" name="">
             <a:extLst xmlns:a="http://schemas.openxmlformats.org/drawingml/2006/main">
               <a:ext uri="{FF2B5EF4-FFF2-40B4-BE49-F238E27FC236}">
-                <a16:creationId xmlns:a16="http://schemas.microsoft.com/office/drawing/2014/main" id="{73E99899-31F7-4F6F-AD98-A2179BB9FC00}"/>
+                <a16:creationId xmlns:a16="http://schemas.microsoft.com/office/drawing/2014/main" id="{C7983036-7813-40F1-B9DB-9901A266B962}"/>
               </a:ext>
             </a:extLst>
           </p:cNvPr>
@@ -7768,7 +7768,7 @@
           <p:cNvPr id="23" name="">
             <a:extLst xmlns:a="http://schemas.openxmlformats.org/drawingml/2006/main">
               <a:ext uri="{FF2B5EF4-FFF2-40B4-BE49-F238E27FC236}">
-                <a16:creationId xmlns:a16="http://schemas.microsoft.com/office/drawing/2014/main" id="{F3579523-980E-4299-88D2-023C42D0B16F}"/>
+                <a16:creationId xmlns:a16="http://schemas.microsoft.com/office/drawing/2014/main" id="{FD6EB7B4-0477-4AD0-AD6B-33FDAE11FFBA}"/>
               </a:ext>
             </a:extLst>
           </p:cNvPr>
@@ -7827,7 +7827,7 @@
     </p:spTree>
     <p:extLst>
       <p:ext uri="{BB962C8B-B14F-4D97-AF65-F5344CB8AC3E}">
-        <p14:creationId xmlns:p14="http://schemas.microsoft.com/office/powerpoint/2010/main" val="540964750"/>
+        <p14:creationId xmlns:p14="http://schemas.microsoft.com/office/powerpoint/2010/main" val="111115270"/>
       </p:ext>
     </p:extLst>
   </p:cSld>
@@ -7858,7 +7858,7 @@
           <p:cNvPr id="10" name="">
             <a:extLst xmlns:a="http://schemas.openxmlformats.org/drawingml/2006/main">
               <a:ext uri="{FF2B5EF4-FFF2-40B4-BE49-F238E27FC236}">
-                <a16:creationId xmlns:a16="http://schemas.microsoft.com/office/drawing/2014/main" id="{AB20D97E-9D91-4FBA-93C8-CECFDF164704}"/>
+                <a16:creationId xmlns:a16="http://schemas.microsoft.com/office/drawing/2014/main" id="{412B1A24-B9A3-4DC3-9E00-BDC897964421}"/>
               </a:ext>
             </a:extLst>
           </p:cNvPr>
@@ -7919,7 +7919,7 @@
           <p:cNvPr id="2" name="">
             <a:extLst xmlns:a="http://schemas.openxmlformats.org/drawingml/2006/main">
               <a:ext uri="{FF2B5EF4-FFF2-40B4-BE49-F238E27FC236}">
-                <a16:creationId xmlns:a16="http://schemas.microsoft.com/office/drawing/2014/main" id="{C7668DCA-45A3-4FB4-BFD4-56B2444A3159}"/>
+                <a16:creationId xmlns:a16="http://schemas.microsoft.com/office/drawing/2014/main" id="{5A3119F1-E03C-4927-80F3-52ACC5D6BFFB}"/>
               </a:ext>
             </a:extLst>
           </p:cNvPr>
@@ -7980,7 +7980,7 @@
           <p:cNvPr id="3" name="">
             <a:extLst xmlns:a="http://schemas.openxmlformats.org/drawingml/2006/main">
               <a:ext uri="{FF2B5EF4-FFF2-40B4-BE49-F238E27FC236}">
-                <a16:creationId xmlns:a16="http://schemas.microsoft.com/office/drawing/2014/main" id="{7F29E13D-841B-431B-9F18-BB4263FE7C06}"/>
+                <a16:creationId xmlns:a16="http://schemas.microsoft.com/office/drawing/2014/main" id="{3C67D8C6-AB42-47F3-A168-3894553DE341}"/>
               </a:ext>
             </a:extLst>
           </p:cNvPr>
@@ -8041,7 +8041,7 @@
           <p:cNvPr id="4" name="">
             <a:extLst xmlns:a="http://schemas.openxmlformats.org/drawingml/2006/main">
               <a:ext uri="{FF2B5EF4-FFF2-40B4-BE49-F238E27FC236}">
-                <a16:creationId xmlns:a16="http://schemas.microsoft.com/office/drawing/2014/main" id="{791850D9-50D6-484A-8936-68BA3CA236EA}"/>
+                <a16:creationId xmlns:a16="http://schemas.microsoft.com/office/drawing/2014/main" id="{16C86225-CD88-44E7-9457-1553BB10D505}"/>
               </a:ext>
             </a:extLst>
           </p:cNvPr>
@@ -8073,7 +8073,7 @@
           <p:cNvPr id="5" name="">
             <a:extLst xmlns:a="http://schemas.openxmlformats.org/drawingml/2006/main">
               <a:ext uri="{FF2B5EF4-FFF2-40B4-BE49-F238E27FC236}">
-                <a16:creationId xmlns:a16="http://schemas.microsoft.com/office/drawing/2014/main" id="{902431F5-9C74-4BD1-96D4-143121C74EB2}"/>
+                <a16:creationId xmlns:a16="http://schemas.microsoft.com/office/drawing/2014/main" id="{FA187158-141C-4729-B69C-5F5064E9DE47}"/>
               </a:ext>
             </a:extLst>
           </p:cNvPr>
@@ -8134,7 +8134,7 @@
           <p:cNvPr id="6" name="">
             <a:extLst xmlns:a="http://schemas.openxmlformats.org/drawingml/2006/main">
               <a:ext uri="{FF2B5EF4-FFF2-40B4-BE49-F238E27FC236}">
-                <a16:creationId xmlns:a16="http://schemas.microsoft.com/office/drawing/2014/main" id="{27A66E24-ECE2-4036-B184-E1560988E9D4}"/>
+                <a16:creationId xmlns:a16="http://schemas.microsoft.com/office/drawing/2014/main" id="{578F0930-A25C-4E63-961A-CA32B846D542}"/>
               </a:ext>
             </a:extLst>
           </p:cNvPr>
@@ -8185,7 +8185,7 @@
                 <a:ea typeface="IBM Plex Sans KR"/>
                 <a:cs typeface="IBM Plex Sans KR"/>
               </a:rPr>
-              <a:t>교과서 04-1 · 15쪽</a:t>
+              <a:t>교과서 04-1 · 18쪽</a:t>
             </a:r>
           </a:p>
         </p:txBody>
@@ -8195,7 +8195,7 @@
           <p:cNvPr id="7" name="">
             <a:extLst xmlns:a="http://schemas.openxmlformats.org/drawingml/2006/main">
               <a:ext uri="{FF2B5EF4-FFF2-40B4-BE49-F238E27FC236}">
-                <a16:creationId xmlns:a16="http://schemas.microsoft.com/office/drawing/2014/main" id="{A4364F0E-771A-4099-A246-D8F4C1AC42CC}"/>
+                <a16:creationId xmlns:a16="http://schemas.microsoft.com/office/drawing/2014/main" id="{A12B7C44-D81A-4ACD-80C1-7EEE4D9ED4EA}"/>
               </a:ext>
             </a:extLst>
           </p:cNvPr>
@@ -8441,7 +8441,7 @@
                           <a:ea typeface="IBM Plex Sans KR"/>
                           <a:cs typeface="IBM Plex Sans KR"/>
                         </a:rPr>
-                        <a:t>첫 행</a:t>
+                        <a:t>첫 데이터 행 (Excel 2행)</a:t>
                       </a:r>
                     </a:p>
                   </a:txBody>
@@ -8590,7 +8590,7 @@
           <p:cNvPr id="9" name="">
             <a:extLst xmlns:a="http://schemas.openxmlformats.org/drawingml/2006/main">
               <a:ext uri="{FF2B5EF4-FFF2-40B4-BE49-F238E27FC236}">
-                <a16:creationId xmlns:a16="http://schemas.microsoft.com/office/drawing/2014/main" id="{9609CB8C-BA0D-464F-9B40-4DFAFF4B12C4}"/>
+                <a16:creationId xmlns:a16="http://schemas.microsoft.com/office/drawing/2014/main" id="{8D89FC2B-3CDA-4C2B-967E-2262E4139C9E}"/>
               </a:ext>
             </a:extLst>
           </p:cNvPr>
@@ -8649,7 +8649,7 @@
     </p:spTree>
     <p:extLst>
       <p:ext uri="{BB962C8B-B14F-4D97-AF65-F5344CB8AC3E}">
-        <p14:creationId xmlns:p14="http://schemas.microsoft.com/office/powerpoint/2010/main" val="2010851457"/>
+        <p14:creationId xmlns:p14="http://schemas.microsoft.com/office/powerpoint/2010/main" val="1364980431"/>
       </p:ext>
     </p:extLst>
   </p:cSld>
@@ -8680,7 +8680,7 @@
           <p:cNvPr id="8" name="">
             <a:extLst xmlns:a="http://schemas.openxmlformats.org/drawingml/2006/main">
               <a:ext uri="{FF2B5EF4-FFF2-40B4-BE49-F238E27FC236}">
-                <a16:creationId xmlns:a16="http://schemas.microsoft.com/office/drawing/2014/main" id="{F9744417-6478-4478-8CF6-9448C5262C33}"/>
+                <a16:creationId xmlns:a16="http://schemas.microsoft.com/office/drawing/2014/main" id="{0900F1A3-16AF-4082-8161-6C3490169AAC}"/>
               </a:ext>
             </a:extLst>
           </p:cNvPr>
@@ -8712,7 +8712,7 @@
           <p:cNvPr id="2" name="">
             <a:extLst xmlns:a="http://schemas.openxmlformats.org/drawingml/2006/main">
               <a:ext uri="{FF2B5EF4-FFF2-40B4-BE49-F238E27FC236}">
-                <a16:creationId xmlns:a16="http://schemas.microsoft.com/office/drawing/2014/main" id="{5ACA6CD1-B800-40E2-8A2A-1D602E5BCE7D}"/>
+                <a16:creationId xmlns:a16="http://schemas.microsoft.com/office/drawing/2014/main" id="{5FE0EA43-98DD-4210-B33C-8C8CD0F07FE3}"/>
               </a:ext>
             </a:extLst>
           </p:cNvPr>
@@ -8773,7 +8773,7 @@
           <p:cNvPr id="3" name="">
             <a:extLst xmlns:a="http://schemas.openxmlformats.org/drawingml/2006/main">
               <a:ext uri="{FF2B5EF4-FFF2-40B4-BE49-F238E27FC236}">
-                <a16:creationId xmlns:a16="http://schemas.microsoft.com/office/drawing/2014/main" id="{7CA8DD51-07E1-4A63-919F-3E5809DF218A}"/>
+                <a16:creationId xmlns:a16="http://schemas.microsoft.com/office/drawing/2014/main" id="{9E08CD67-185D-43A9-A73F-60429447C58E}"/>
               </a:ext>
             </a:extLst>
           </p:cNvPr>
@@ -8785,7 +8785,7 @@
         <p:spPr>
           <a:xfrm xmlns:a="http://schemas.openxmlformats.org/drawingml/2006/main">
             <a:off x="533400" y="1952625"/>
-            <a:ext cx="7239000" cy="1066800"/>
+            <a:ext cx="7810500" cy="1066800"/>
           </a:xfrm>
           <a:prstGeom xmlns:a="http://schemas.openxmlformats.org/drawingml/2006/main" prst="rect">
             <a:avLst/>
@@ -8824,7 +8824,7 @@
                 <a:ea typeface="IBM Plex Sans KR"/>
                 <a:cs typeface="IBM Plex Sans KR"/>
               </a:rPr>
-              <a:t>결과를 검토하고</a:t>
+              <a:t>결과가 맞는지 검토하며</a:t>
             </a:r>
           </a:p>
           <a:p xmlns:a="http://schemas.openxmlformats.org/drawingml/2006/main">
@@ -8851,7 +8851,7 @@
                 <a:ea typeface="IBM Plex Sans KR"/>
                 <a:cs typeface="IBM Plex Sans KR"/>
               </a:rPr>
-              <a:t>작업을 저장한다</a:t>
+              <a:t>마무리한다</a:t>
             </a:r>
           </a:p>
         </p:txBody>
@@ -8861,7 +8861,7 @@
           <p:cNvPr id="4" name="">
             <a:extLst xmlns:a="http://schemas.openxmlformats.org/drawingml/2006/main">
               <a:ext uri="{FF2B5EF4-FFF2-40B4-BE49-F238E27FC236}">
-                <a16:creationId xmlns:a16="http://schemas.microsoft.com/office/drawing/2014/main" id="{51DA99A6-196B-4DE2-A607-6FD5DF2111A8}"/>
+                <a16:creationId xmlns:a16="http://schemas.microsoft.com/office/drawing/2014/main" id="{2D7DF5DE-025F-44E2-A64D-58834D8E157E}"/>
               </a:ext>
             </a:extLst>
           </p:cNvPr>
@@ -8912,7 +8912,7 @@
                 <a:ea typeface="IBM Plex Sans KR"/>
                 <a:cs typeface="IBM Plex Sans KR"/>
               </a:rPr>
-              <a:t>오늘은 설정 파일을 읽고 오류를 AI에게 전달한 뒤, Excel과 함께 결과를 검토했어요.</a:t>
+              <a:t>자료의 뜻을 읽고 AI에게 나누어 요청한 뒤, Excel 원본과 결과를 비교했어요.</a:t>
             </a:r>
           </a:p>
         </p:txBody>
@@ -8922,7 +8922,7 @@
           <p:cNvPr id="5" name="">
             <a:extLst xmlns:a="http://schemas.openxmlformats.org/drawingml/2006/main">
               <a:ext uri="{FF2B5EF4-FFF2-40B4-BE49-F238E27FC236}">
-                <a16:creationId xmlns:a16="http://schemas.microsoft.com/office/drawing/2014/main" id="{E292C3BC-E83D-4552-849E-02974FE49C71}"/>
+                <a16:creationId xmlns:a16="http://schemas.microsoft.com/office/drawing/2014/main" id="{A9AE9405-6219-45E8-907E-E99BD28F4F56}"/>
               </a:ext>
             </a:extLst>
           </p:cNvPr>
@@ -8983,7 +8983,7 @@
           <p:cNvPr id="6" name="">
             <a:extLst xmlns:a="http://schemas.openxmlformats.org/drawingml/2006/main">
               <a:ext uri="{FF2B5EF4-FFF2-40B4-BE49-F238E27FC236}">
-                <a16:creationId xmlns:a16="http://schemas.microsoft.com/office/drawing/2014/main" id="{6A8B455B-7C6A-40F4-A223-EB2A63178A20}"/>
+                <a16:creationId xmlns:a16="http://schemas.microsoft.com/office/drawing/2014/main" id="{6D879DA6-6C5B-4454-A6FB-07BB85194E87}"/>
               </a:ext>
             </a:extLst>
           </p:cNvPr>
@@ -9034,7 +9034,7 @@
                 <a:ea typeface="IBM Plex Sans KR"/>
                 <a:cs typeface="IBM Plex Sans KR"/>
               </a:rPr>
-              <a:t>교과서 04-1 · 16쪽</a:t>
+              <a:t>교과서 04-1 · 19쪽</a:t>
             </a:r>
           </a:p>
         </p:txBody>
@@ -9044,7 +9044,7 @@
           <p:cNvPr id="7" name="">
             <a:extLst xmlns:a="http://schemas.openxmlformats.org/drawingml/2006/main">
               <a:ext uri="{FF2B5EF4-FFF2-40B4-BE49-F238E27FC236}">
-                <a16:creationId xmlns:a16="http://schemas.microsoft.com/office/drawing/2014/main" id="{24302090-1B92-44E7-A49F-B4912E06A6C1}"/>
+                <a16:creationId xmlns:a16="http://schemas.microsoft.com/office/drawing/2014/main" id="{4FE48E73-F8C9-4386-82B9-465A7AFC027F}"/>
               </a:ext>
             </a:extLst>
           </p:cNvPr>
@@ -9103,7 +9103,7 @@
     </p:spTree>
     <p:extLst>
       <p:ext uri="{BB962C8B-B14F-4D97-AF65-F5344CB8AC3E}">
-        <p14:creationId xmlns:p14="http://schemas.microsoft.com/office/powerpoint/2010/main" val="2064502140"/>
+        <p14:creationId xmlns:p14="http://schemas.microsoft.com/office/powerpoint/2010/main" val="947287948"/>
       </p:ext>
     </p:extLst>
   </p:cSld>
@@ -9134,7 +9134,7 @@
           <p:cNvPr id="25" name="">
             <a:extLst xmlns:a="http://schemas.openxmlformats.org/drawingml/2006/main">
               <a:ext uri="{FF2B5EF4-FFF2-40B4-BE49-F238E27FC236}">
-                <a16:creationId xmlns:a16="http://schemas.microsoft.com/office/drawing/2014/main" id="{FB4E5023-A9FC-4763-B99A-6D0F5C3D9A2C}"/>
+                <a16:creationId xmlns:a16="http://schemas.microsoft.com/office/drawing/2014/main" id="{93DA0A91-D56C-4BD3-ACEA-712B17340438}"/>
               </a:ext>
             </a:extLst>
           </p:cNvPr>
@@ -9195,7 +9195,7 @@
           <p:cNvPr id="2" name="">
             <a:extLst xmlns:a="http://schemas.openxmlformats.org/drawingml/2006/main">
               <a:ext uri="{FF2B5EF4-FFF2-40B4-BE49-F238E27FC236}">
-                <a16:creationId xmlns:a16="http://schemas.microsoft.com/office/drawing/2014/main" id="{639B3A78-F9FC-4C6C-BFCD-18400CBBE368}"/>
+                <a16:creationId xmlns:a16="http://schemas.microsoft.com/office/drawing/2014/main" id="{90151B13-7A33-49AA-A0B2-8D74E74904ED}"/>
               </a:ext>
             </a:extLst>
           </p:cNvPr>
@@ -9256,7 +9256,7 @@
           <p:cNvPr id="3" name="">
             <a:extLst xmlns:a="http://schemas.openxmlformats.org/drawingml/2006/main">
               <a:ext uri="{FF2B5EF4-FFF2-40B4-BE49-F238E27FC236}">
-                <a16:creationId xmlns:a16="http://schemas.microsoft.com/office/drawing/2014/main" id="{E853E3A7-281F-4E96-9CFC-18C32305E02A}"/>
+                <a16:creationId xmlns:a16="http://schemas.microsoft.com/office/drawing/2014/main" id="{12B068B5-AC0C-4128-A2D5-D2032F5A1539}"/>
               </a:ext>
             </a:extLst>
           </p:cNvPr>
@@ -9317,7 +9317,7 @@
           <p:cNvPr id="4" name="">
             <a:extLst xmlns:a="http://schemas.openxmlformats.org/drawingml/2006/main">
               <a:ext uri="{FF2B5EF4-FFF2-40B4-BE49-F238E27FC236}">
-                <a16:creationId xmlns:a16="http://schemas.microsoft.com/office/drawing/2014/main" id="{FB1621AC-BA9D-449F-92C3-32A5E810B8F5}"/>
+                <a16:creationId xmlns:a16="http://schemas.microsoft.com/office/drawing/2014/main" id="{8FC86C31-451D-471F-B871-9B1231130C96}"/>
               </a:ext>
             </a:extLst>
           </p:cNvPr>
@@ -9349,7 +9349,7 @@
           <p:cNvPr id="5" name="">
             <a:extLst xmlns:a="http://schemas.openxmlformats.org/drawingml/2006/main">
               <a:ext uri="{FF2B5EF4-FFF2-40B4-BE49-F238E27FC236}">
-                <a16:creationId xmlns:a16="http://schemas.microsoft.com/office/drawing/2014/main" id="{9EB75E7B-4A56-4A88-A34F-6E4E04985E4D}"/>
+                <a16:creationId xmlns:a16="http://schemas.microsoft.com/office/drawing/2014/main" id="{ABC421A2-339F-4874-8192-1D0CC550EFB7}"/>
               </a:ext>
             </a:extLst>
           </p:cNvPr>
@@ -9410,7 +9410,7 @@
           <p:cNvPr id="6" name="">
             <a:extLst xmlns:a="http://schemas.openxmlformats.org/drawingml/2006/main">
               <a:ext uri="{FF2B5EF4-FFF2-40B4-BE49-F238E27FC236}">
-                <a16:creationId xmlns:a16="http://schemas.microsoft.com/office/drawing/2014/main" id="{3317411B-B61D-4FCA-B4D1-D07B501192AD}"/>
+                <a16:creationId xmlns:a16="http://schemas.microsoft.com/office/drawing/2014/main" id="{2635C162-D88F-4C64-98A7-4B3202EB2C93}"/>
               </a:ext>
             </a:extLst>
           </p:cNvPr>
@@ -9461,7 +9461,7 @@
                 <a:ea typeface="IBM Plex Sans KR"/>
                 <a:cs typeface="IBM Plex Sans KR"/>
               </a:rPr>
-              <a:t>교과서 04-1 · 2쪽</a:t>
+              <a:t>교과서 04-1 · 2–3쪽</a:t>
             </a:r>
           </a:p>
         </p:txBody>
@@ -9471,7 +9471,7 @@
           <p:cNvPr id="7" name="">
             <a:extLst xmlns:a="http://schemas.openxmlformats.org/drawingml/2006/main">
               <a:ext uri="{FF2B5EF4-FFF2-40B4-BE49-F238E27FC236}">
-                <a16:creationId xmlns:a16="http://schemas.microsoft.com/office/drawing/2014/main" id="{FD7BE617-AB36-4632-8858-4B326676486F}"/>
+                <a16:creationId xmlns:a16="http://schemas.microsoft.com/office/drawing/2014/main" id="{72B1D0DB-A9B5-465D-9818-6373C3E9C031}"/>
               </a:ext>
             </a:extLst>
           </p:cNvPr>
@@ -9536,7 +9536,7 @@
           <p:nvPr/>
         </p:nvPicPr>
         <p:blipFill>
-          <a:blip xmlns:r="http://schemas.openxmlformats.org/officeDocument/2006/relationships" xmlns:a="http://schemas.openxmlformats.org/drawingml/2006/main" r:embed="Re9194c28665d42e8"/>
+          <a:blip xmlns:r="http://schemas.openxmlformats.org/officeDocument/2006/relationships" xmlns:a="http://schemas.openxmlformats.org/drawingml/2006/main" r:embed="Rfc21c74f7252423c"/>
           <a:stretch xmlns:a="http://schemas.openxmlformats.org/drawingml/2006/main"/>
         </p:blipFill>
         <p:spPr>
@@ -9554,7 +9554,7 @@
           <p:cNvPr id="9" name="">
             <a:extLst xmlns:a="http://schemas.openxmlformats.org/drawingml/2006/main">
               <a:ext uri="{FF2B5EF4-FFF2-40B4-BE49-F238E27FC236}">
-                <a16:creationId xmlns:a16="http://schemas.microsoft.com/office/drawing/2014/main" id="{0636272A-DE89-4841-AE76-F8B6DB4355EB}"/>
+                <a16:creationId xmlns:a16="http://schemas.microsoft.com/office/drawing/2014/main" id="{F1729FE8-080B-4C73-8A71-1F5FA22E1FA3}"/>
               </a:ext>
             </a:extLst>
           </p:cNvPr>
@@ -9588,7 +9588,7 @@
           <p:cNvPr id="10" name="">
             <a:extLst xmlns:a="http://schemas.openxmlformats.org/drawingml/2006/main">
               <a:ext uri="{FF2B5EF4-FFF2-40B4-BE49-F238E27FC236}">
-                <a16:creationId xmlns:a16="http://schemas.microsoft.com/office/drawing/2014/main" id="{B33663F8-58D7-4FA5-BB92-93CA9A25A520}"/>
+                <a16:creationId xmlns:a16="http://schemas.microsoft.com/office/drawing/2014/main" id="{198CAB29-3561-4306-89EE-643455663328}"/>
               </a:ext>
             </a:extLst>
           </p:cNvPr>
@@ -9649,7 +9649,7 @@
           <p:cNvPr id="11" name="">
             <a:extLst xmlns:a="http://schemas.openxmlformats.org/drawingml/2006/main">
               <a:ext uri="{FF2B5EF4-FFF2-40B4-BE49-F238E27FC236}">
-                <a16:creationId xmlns:a16="http://schemas.microsoft.com/office/drawing/2014/main" id="{D7B77B82-7F49-4436-A57A-E79B64B7DCB5}"/>
+                <a16:creationId xmlns:a16="http://schemas.microsoft.com/office/drawing/2014/main" id="{61A57475-3BD6-494F-A418-0BB081E92B94}"/>
               </a:ext>
             </a:extLst>
           </p:cNvPr>
@@ -9710,7 +9710,7 @@
           <p:cNvPr id="12" name="">
             <a:extLst xmlns:a="http://schemas.openxmlformats.org/drawingml/2006/main">
               <a:ext uri="{FF2B5EF4-FFF2-40B4-BE49-F238E27FC236}">
-                <a16:creationId xmlns:a16="http://schemas.microsoft.com/office/drawing/2014/main" id="{6994F0F2-AD99-4909-93B3-F63DEE63D9EE}"/>
+                <a16:creationId xmlns:a16="http://schemas.microsoft.com/office/drawing/2014/main" id="{4A2C79CE-8140-4E73-94C1-5F43DD0104B7}"/>
               </a:ext>
             </a:extLst>
           </p:cNvPr>
@@ -9771,7 +9771,7 @@
           <p:cNvPr id="13" name="">
             <a:extLst xmlns:a="http://schemas.openxmlformats.org/drawingml/2006/main">
               <a:ext uri="{FF2B5EF4-FFF2-40B4-BE49-F238E27FC236}">
-                <a16:creationId xmlns:a16="http://schemas.microsoft.com/office/drawing/2014/main" id="{AA370877-8E10-4299-A033-7D7F11CDBCB2}"/>
+                <a16:creationId xmlns:a16="http://schemas.microsoft.com/office/drawing/2014/main" id="{7228808D-BA62-49FB-A55D-6A4B1158DFD5}"/>
               </a:ext>
             </a:extLst>
           </p:cNvPr>
@@ -9805,7 +9805,7 @@
           <p:cNvPr id="14" name="">
             <a:extLst xmlns:a="http://schemas.openxmlformats.org/drawingml/2006/main">
               <a:ext uri="{FF2B5EF4-FFF2-40B4-BE49-F238E27FC236}">
-                <a16:creationId xmlns:a16="http://schemas.microsoft.com/office/drawing/2014/main" id="{0F7B3B95-E00C-4582-AD2B-E32FBF0DED62}"/>
+                <a16:creationId xmlns:a16="http://schemas.microsoft.com/office/drawing/2014/main" id="{9A79CF4E-8651-4BCF-A7E9-9E97CF677488}"/>
               </a:ext>
             </a:extLst>
           </p:cNvPr>
@@ -9866,7 +9866,7 @@
           <p:cNvPr id="15" name="">
             <a:extLst xmlns:a="http://schemas.openxmlformats.org/drawingml/2006/main">
               <a:ext uri="{FF2B5EF4-FFF2-40B4-BE49-F238E27FC236}">
-                <a16:creationId xmlns:a16="http://schemas.microsoft.com/office/drawing/2014/main" id="{37F03A28-5102-498C-B717-710D51FCB0A2}"/>
+                <a16:creationId xmlns:a16="http://schemas.microsoft.com/office/drawing/2014/main" id="{BB62FE9E-9A05-46A3-A90D-28C36245723B}"/>
               </a:ext>
             </a:extLst>
           </p:cNvPr>
@@ -9927,7 +9927,7 @@
           <p:cNvPr id="16" name="">
             <a:extLst xmlns:a="http://schemas.openxmlformats.org/drawingml/2006/main">
               <a:ext uri="{FF2B5EF4-FFF2-40B4-BE49-F238E27FC236}">
-                <a16:creationId xmlns:a16="http://schemas.microsoft.com/office/drawing/2014/main" id="{80A24C37-9CFB-4C82-BB77-7637672B2A92}"/>
+                <a16:creationId xmlns:a16="http://schemas.microsoft.com/office/drawing/2014/main" id="{4CDD2A9C-7D41-4245-B360-46161E7B510D}"/>
               </a:ext>
             </a:extLst>
           </p:cNvPr>
@@ -9988,7 +9988,7 @@
           <p:cNvPr id="17" name="">
             <a:extLst xmlns:a="http://schemas.openxmlformats.org/drawingml/2006/main">
               <a:ext uri="{FF2B5EF4-FFF2-40B4-BE49-F238E27FC236}">
-                <a16:creationId xmlns:a16="http://schemas.microsoft.com/office/drawing/2014/main" id="{D6FB38D0-AAAC-43E4-BE9C-06D8444A646F}"/>
+                <a16:creationId xmlns:a16="http://schemas.microsoft.com/office/drawing/2014/main" id="{839B496D-6402-4956-8AB0-0FE9A4413257}"/>
               </a:ext>
             </a:extLst>
           </p:cNvPr>
@@ -10022,7 +10022,7 @@
           <p:cNvPr id="18" name="">
             <a:extLst xmlns:a="http://schemas.openxmlformats.org/drawingml/2006/main">
               <a:ext uri="{FF2B5EF4-FFF2-40B4-BE49-F238E27FC236}">
-                <a16:creationId xmlns:a16="http://schemas.microsoft.com/office/drawing/2014/main" id="{0635C9A5-0A11-4E47-8EAA-0E098FE9ED6B}"/>
+                <a16:creationId xmlns:a16="http://schemas.microsoft.com/office/drawing/2014/main" id="{98A1558E-F039-4CFB-BB9C-D8025D680BDF}"/>
               </a:ext>
             </a:extLst>
           </p:cNvPr>
@@ -10083,7 +10083,7 @@
           <p:cNvPr id="19" name="">
             <a:extLst xmlns:a="http://schemas.openxmlformats.org/drawingml/2006/main">
               <a:ext uri="{FF2B5EF4-FFF2-40B4-BE49-F238E27FC236}">
-                <a16:creationId xmlns:a16="http://schemas.microsoft.com/office/drawing/2014/main" id="{18B2EFE0-2C68-4263-8914-E913FF3C6D74}"/>
+                <a16:creationId xmlns:a16="http://schemas.microsoft.com/office/drawing/2014/main" id="{23AD5762-9A04-4E53-A1AC-3F987EBE93DC}"/>
               </a:ext>
             </a:extLst>
           </p:cNvPr>
@@ -10144,7 +10144,7 @@
           <p:cNvPr id="20" name="">
             <a:extLst xmlns:a="http://schemas.openxmlformats.org/drawingml/2006/main">
               <a:ext uri="{FF2B5EF4-FFF2-40B4-BE49-F238E27FC236}">
-                <a16:creationId xmlns:a16="http://schemas.microsoft.com/office/drawing/2014/main" id="{62B70C44-857D-4929-862F-52BA961B8F6B}"/>
+                <a16:creationId xmlns:a16="http://schemas.microsoft.com/office/drawing/2014/main" id="{D206B8CB-BB86-4799-9922-329377EDB8D3}"/>
               </a:ext>
             </a:extLst>
           </p:cNvPr>
@@ -10205,7 +10205,7 @@
           <p:cNvPr id="21" name="">
             <a:extLst xmlns:a="http://schemas.openxmlformats.org/drawingml/2006/main">
               <a:ext uri="{FF2B5EF4-FFF2-40B4-BE49-F238E27FC236}">
-                <a16:creationId xmlns:a16="http://schemas.microsoft.com/office/drawing/2014/main" id="{C690A52B-185A-48E1-9198-832FA9CE006F}"/>
+                <a16:creationId xmlns:a16="http://schemas.microsoft.com/office/drawing/2014/main" id="{63D3BE2E-37B8-4D9D-840B-B104F2396C2A}"/>
               </a:ext>
             </a:extLst>
           </p:cNvPr>
@@ -10239,7 +10239,7 @@
           <p:cNvPr id="22" name="">
             <a:extLst xmlns:a="http://schemas.openxmlformats.org/drawingml/2006/main">
               <a:ext uri="{FF2B5EF4-FFF2-40B4-BE49-F238E27FC236}">
-                <a16:creationId xmlns:a16="http://schemas.microsoft.com/office/drawing/2014/main" id="{4704F01D-98F5-4152-96A3-AC9CD1C7A98B}"/>
+                <a16:creationId xmlns:a16="http://schemas.microsoft.com/office/drawing/2014/main" id="{FFDC6159-C5D0-4CCF-9ABF-6ECD6D4D181D}"/>
               </a:ext>
             </a:extLst>
           </p:cNvPr>
@@ -10300,7 +10300,7 @@
           <p:cNvPr id="23" name="">
             <a:extLst xmlns:a="http://schemas.openxmlformats.org/drawingml/2006/main">
               <a:ext uri="{FF2B5EF4-FFF2-40B4-BE49-F238E27FC236}">
-                <a16:creationId xmlns:a16="http://schemas.microsoft.com/office/drawing/2014/main" id="{FBCF6D5C-559D-41EE-A057-98C5B2EBFE85}"/>
+                <a16:creationId xmlns:a16="http://schemas.microsoft.com/office/drawing/2014/main" id="{10873739-60DB-486C-B9A1-4E4BB8139BF2}"/>
               </a:ext>
             </a:extLst>
           </p:cNvPr>
@@ -10361,7 +10361,7 @@
           <p:cNvPr id="24" name="">
             <a:extLst xmlns:a="http://schemas.openxmlformats.org/drawingml/2006/main">
               <a:ext uri="{FF2B5EF4-FFF2-40B4-BE49-F238E27FC236}">
-                <a16:creationId xmlns:a16="http://schemas.microsoft.com/office/drawing/2014/main" id="{F9B3C078-5ADC-4129-B4E0-022B28576FDD}"/>
+                <a16:creationId xmlns:a16="http://schemas.microsoft.com/office/drawing/2014/main" id="{53759D03-AFCB-4689-9A33-A1892E92ACB3}"/>
               </a:ext>
             </a:extLst>
           </p:cNvPr>
@@ -10420,7 +10420,7 @@
     </p:spTree>
     <p:extLst>
       <p:ext uri="{BB962C8B-B14F-4D97-AF65-F5344CB8AC3E}">
-        <p14:creationId xmlns:p14="http://schemas.microsoft.com/office/powerpoint/2010/main" val="1490779527"/>
+        <p14:creationId xmlns:p14="http://schemas.microsoft.com/office/powerpoint/2010/main" val="824443622"/>
       </p:ext>
     </p:extLst>
   </p:cSld>
@@ -10451,7 +10451,7 @@
           <p:cNvPr id="11" name="">
             <a:extLst xmlns:a="http://schemas.openxmlformats.org/drawingml/2006/main">
               <a:ext uri="{FF2B5EF4-FFF2-40B4-BE49-F238E27FC236}">
-                <a16:creationId xmlns:a16="http://schemas.microsoft.com/office/drawing/2014/main" id="{43B715C9-5D23-458C-B563-0259A722B675}"/>
+                <a16:creationId xmlns:a16="http://schemas.microsoft.com/office/drawing/2014/main" id="{345FF19E-D2FF-48CF-AD0A-26A0E0351EA8}"/>
               </a:ext>
             </a:extLst>
           </p:cNvPr>
@@ -10512,7 +10512,7 @@
           <p:cNvPr id="2" name="">
             <a:extLst xmlns:a="http://schemas.openxmlformats.org/drawingml/2006/main">
               <a:ext uri="{FF2B5EF4-FFF2-40B4-BE49-F238E27FC236}">
-                <a16:creationId xmlns:a16="http://schemas.microsoft.com/office/drawing/2014/main" id="{0EC19E52-8509-4B9C-9954-E62DE3D5A450}"/>
+                <a16:creationId xmlns:a16="http://schemas.microsoft.com/office/drawing/2014/main" id="{D0003F38-C29F-4F41-8E56-97F8C36A5904}"/>
               </a:ext>
             </a:extLst>
           </p:cNvPr>
@@ -10573,7 +10573,7 @@
           <p:cNvPr id="3" name="">
             <a:extLst xmlns:a="http://schemas.openxmlformats.org/drawingml/2006/main">
               <a:ext uri="{FF2B5EF4-FFF2-40B4-BE49-F238E27FC236}">
-                <a16:creationId xmlns:a16="http://schemas.microsoft.com/office/drawing/2014/main" id="{544B1BDF-160B-4621-B1FF-652AB37D03E7}"/>
+                <a16:creationId xmlns:a16="http://schemas.microsoft.com/office/drawing/2014/main" id="{2517037B-F4F0-4A4C-AE5D-F556700BF736}"/>
               </a:ext>
             </a:extLst>
           </p:cNvPr>
@@ -10634,7 +10634,7 @@
           <p:cNvPr id="4" name="">
             <a:extLst xmlns:a="http://schemas.openxmlformats.org/drawingml/2006/main">
               <a:ext uri="{FF2B5EF4-FFF2-40B4-BE49-F238E27FC236}">
-                <a16:creationId xmlns:a16="http://schemas.microsoft.com/office/drawing/2014/main" id="{FA796D7C-4526-402E-B6CF-F9C191FC92F7}"/>
+                <a16:creationId xmlns:a16="http://schemas.microsoft.com/office/drawing/2014/main" id="{1DC12734-DD8A-4102-B208-DB8265247EFE}"/>
               </a:ext>
             </a:extLst>
           </p:cNvPr>
@@ -10666,7 +10666,7 @@
           <p:cNvPr id="5" name="">
             <a:extLst xmlns:a="http://schemas.openxmlformats.org/drawingml/2006/main">
               <a:ext uri="{FF2B5EF4-FFF2-40B4-BE49-F238E27FC236}">
-                <a16:creationId xmlns:a16="http://schemas.microsoft.com/office/drawing/2014/main" id="{B2D2D2B4-EC83-4542-BC98-6096F814E059}"/>
+                <a16:creationId xmlns:a16="http://schemas.microsoft.com/office/drawing/2014/main" id="{F5AC5E99-4468-4DFA-A7F5-C8AA46B072B8}"/>
               </a:ext>
             </a:extLst>
           </p:cNvPr>
@@ -10727,7 +10727,7 @@
           <p:cNvPr id="6" name="">
             <a:extLst xmlns:a="http://schemas.openxmlformats.org/drawingml/2006/main">
               <a:ext uri="{FF2B5EF4-FFF2-40B4-BE49-F238E27FC236}">
-                <a16:creationId xmlns:a16="http://schemas.microsoft.com/office/drawing/2014/main" id="{261757A0-5DE1-45C1-9F6E-64964B90B70F}"/>
+                <a16:creationId xmlns:a16="http://schemas.microsoft.com/office/drawing/2014/main" id="{F638CC4F-CEA0-4ED1-9460-E8A17EA5D889}"/>
               </a:ext>
             </a:extLst>
           </p:cNvPr>
@@ -10778,7 +10778,7 @@
                 <a:ea typeface="IBM Plex Sans KR"/>
                 <a:cs typeface="IBM Plex Sans KR"/>
               </a:rPr>
-              <a:t>교과서 04-1 · 3쪽</a:t>
+              <a:t>교과서 04-1 · 4쪽</a:t>
             </a:r>
           </a:p>
         </p:txBody>
@@ -10788,7 +10788,7 @@
           <p:cNvPr id="7" name="">
             <a:extLst xmlns:a="http://schemas.openxmlformats.org/drawingml/2006/main">
               <a:ext uri="{FF2B5EF4-FFF2-40B4-BE49-F238E27FC236}">
-                <a16:creationId xmlns:a16="http://schemas.microsoft.com/office/drawing/2014/main" id="{1EAD8C28-F52E-461A-A989-391E9B95C9FD}"/>
+                <a16:creationId xmlns:a16="http://schemas.microsoft.com/office/drawing/2014/main" id="{88A3D336-46AD-4C9C-AC27-A73914F777AB}"/>
               </a:ext>
             </a:extLst>
           </p:cNvPr>
@@ -11187,7 +11187,7 @@
           <p:nvPr/>
         </p:nvPicPr>
         <p:blipFill>
-          <a:blip xmlns:r="http://schemas.openxmlformats.org/officeDocument/2006/relationships" xmlns:a="http://schemas.openxmlformats.org/drawingml/2006/main" r:embed="R4e3ade5fa6174bd3"/>
+          <a:blip xmlns:r="http://schemas.openxmlformats.org/officeDocument/2006/relationships" xmlns:a="http://schemas.openxmlformats.org/drawingml/2006/main" r:embed="R708c285109fc435f"/>
           <a:stretch xmlns:a="http://schemas.openxmlformats.org/drawingml/2006/main"/>
         </p:blipFill>
         <p:spPr>
@@ -11205,7 +11205,7 @@
           <p:cNvPr id="10" name="">
             <a:extLst xmlns:a="http://schemas.openxmlformats.org/drawingml/2006/main">
               <a:ext uri="{FF2B5EF4-FFF2-40B4-BE49-F238E27FC236}">
-                <a16:creationId xmlns:a16="http://schemas.microsoft.com/office/drawing/2014/main" id="{892D0695-5542-4BBB-BF02-FB9B4799FFB3}"/>
+                <a16:creationId xmlns:a16="http://schemas.microsoft.com/office/drawing/2014/main" id="{716A9007-1488-48C0-99B5-492376FFE43C}"/>
               </a:ext>
             </a:extLst>
           </p:cNvPr>
@@ -11264,7 +11264,7 @@
     </p:spTree>
     <p:extLst>
       <p:ext uri="{BB962C8B-B14F-4D97-AF65-F5344CB8AC3E}">
-        <p14:creationId xmlns:p14="http://schemas.microsoft.com/office/powerpoint/2010/main" val="121395678"/>
+        <p14:creationId xmlns:p14="http://schemas.microsoft.com/office/powerpoint/2010/main" val="1480709442"/>
       </p:ext>
     </p:extLst>
   </p:cSld>
@@ -11295,7 +11295,7 @@
           <p:cNvPr id="18" name="">
             <a:extLst xmlns:a="http://schemas.openxmlformats.org/drawingml/2006/main">
               <a:ext uri="{FF2B5EF4-FFF2-40B4-BE49-F238E27FC236}">
-                <a16:creationId xmlns:a16="http://schemas.microsoft.com/office/drawing/2014/main" id="{27A38792-564E-447F-8D66-609F00C61B7B}"/>
+                <a16:creationId xmlns:a16="http://schemas.microsoft.com/office/drawing/2014/main" id="{D1413DB9-55EA-45EA-803D-8DB67BCE3F80}"/>
               </a:ext>
             </a:extLst>
           </p:cNvPr>
@@ -11356,7 +11356,7 @@
           <p:cNvPr id="2" name="">
             <a:extLst xmlns:a="http://schemas.openxmlformats.org/drawingml/2006/main">
               <a:ext uri="{FF2B5EF4-FFF2-40B4-BE49-F238E27FC236}">
-                <a16:creationId xmlns:a16="http://schemas.microsoft.com/office/drawing/2014/main" id="{EBC455CD-43F1-44F7-A94B-6556098CF2B3}"/>
+                <a16:creationId xmlns:a16="http://schemas.microsoft.com/office/drawing/2014/main" id="{E07CC200-75E6-400D-B5FC-F5ACC0EAFB8E}"/>
               </a:ext>
             </a:extLst>
           </p:cNvPr>
@@ -11417,7 +11417,7 @@
           <p:cNvPr id="3" name="">
             <a:extLst xmlns:a="http://schemas.openxmlformats.org/drawingml/2006/main">
               <a:ext uri="{FF2B5EF4-FFF2-40B4-BE49-F238E27FC236}">
-                <a16:creationId xmlns:a16="http://schemas.microsoft.com/office/drawing/2014/main" id="{76201376-E221-4CF6-AD82-11077926B4C7}"/>
+                <a16:creationId xmlns:a16="http://schemas.microsoft.com/office/drawing/2014/main" id="{EBDD8CED-6765-4DE8-BFC9-575DD835B693}"/>
               </a:ext>
             </a:extLst>
           </p:cNvPr>
@@ -11478,7 +11478,7 @@
           <p:cNvPr id="4" name="">
             <a:extLst xmlns:a="http://schemas.openxmlformats.org/drawingml/2006/main">
               <a:ext uri="{FF2B5EF4-FFF2-40B4-BE49-F238E27FC236}">
-                <a16:creationId xmlns:a16="http://schemas.microsoft.com/office/drawing/2014/main" id="{4E62B74F-A871-4F89-8B07-6779EAAD98A7}"/>
+                <a16:creationId xmlns:a16="http://schemas.microsoft.com/office/drawing/2014/main" id="{699840EF-9E7F-4EB3-9CE1-32D4430AE198}"/>
               </a:ext>
             </a:extLst>
           </p:cNvPr>
@@ -11510,7 +11510,7 @@
           <p:cNvPr id="5" name="">
             <a:extLst xmlns:a="http://schemas.openxmlformats.org/drawingml/2006/main">
               <a:ext uri="{FF2B5EF4-FFF2-40B4-BE49-F238E27FC236}">
-                <a16:creationId xmlns:a16="http://schemas.microsoft.com/office/drawing/2014/main" id="{F0114179-820B-43AD-8C86-7947F3B89AE1}"/>
+                <a16:creationId xmlns:a16="http://schemas.microsoft.com/office/drawing/2014/main" id="{8F7F9B0D-0A7C-4538-A96C-DD1F928A81B5}"/>
               </a:ext>
             </a:extLst>
           </p:cNvPr>
@@ -11571,7 +11571,7 @@
           <p:cNvPr id="6" name="">
             <a:extLst xmlns:a="http://schemas.openxmlformats.org/drawingml/2006/main">
               <a:ext uri="{FF2B5EF4-FFF2-40B4-BE49-F238E27FC236}">
-                <a16:creationId xmlns:a16="http://schemas.microsoft.com/office/drawing/2014/main" id="{1586BC86-A5DB-44B4-9892-26FCEC189D6F}"/>
+                <a16:creationId xmlns:a16="http://schemas.microsoft.com/office/drawing/2014/main" id="{BDB39C4F-21BA-46A9-8A81-82F95CFBB788}"/>
               </a:ext>
             </a:extLst>
           </p:cNvPr>
@@ -11622,7 +11622,7 @@
                 <a:ea typeface="IBM Plex Sans KR"/>
                 <a:cs typeface="IBM Plex Sans KR"/>
               </a:rPr>
-              <a:t>교과서 04-1 · 4쪽</a:t>
+              <a:t>교과서 04-1 · 5쪽</a:t>
             </a:r>
           </a:p>
         </p:txBody>
@@ -11632,7 +11632,7 @@
           <p:cNvPr id="7" name="">
             <a:extLst xmlns:a="http://schemas.openxmlformats.org/drawingml/2006/main">
               <a:ext uri="{FF2B5EF4-FFF2-40B4-BE49-F238E27FC236}">
-                <a16:creationId xmlns:a16="http://schemas.microsoft.com/office/drawing/2014/main" id="{39296F49-EF50-43B1-8CEB-88FC78763250}"/>
+                <a16:creationId xmlns:a16="http://schemas.microsoft.com/office/drawing/2014/main" id="{9343B415-F91E-42F2-8DF1-AAFBE092AF7A}"/>
               </a:ext>
             </a:extLst>
           </p:cNvPr>
@@ -11697,7 +11697,7 @@
           <p:nvPr/>
         </p:nvPicPr>
         <p:blipFill>
-          <a:blip xmlns:r="http://schemas.openxmlformats.org/officeDocument/2006/relationships" xmlns:a="http://schemas.openxmlformats.org/drawingml/2006/main" r:embed="R25444a8ecf504121"/>
+          <a:blip xmlns:r="http://schemas.openxmlformats.org/officeDocument/2006/relationships" xmlns:a="http://schemas.openxmlformats.org/drawingml/2006/main" r:embed="Rf4f9ed31fcf149a7"/>
           <a:stretch xmlns:a="http://schemas.openxmlformats.org/drawingml/2006/main"/>
         </p:blipFill>
         <p:spPr>
@@ -11715,7 +11715,7 @@
           <p:cNvPr id="9" name="">
             <a:extLst xmlns:a="http://schemas.openxmlformats.org/drawingml/2006/main">
               <a:ext uri="{FF2B5EF4-FFF2-40B4-BE49-F238E27FC236}">
-                <a16:creationId xmlns:a16="http://schemas.microsoft.com/office/drawing/2014/main" id="{DF0668E3-E8C2-43B2-9480-F8C7417BD1C0}"/>
+                <a16:creationId xmlns:a16="http://schemas.microsoft.com/office/drawing/2014/main" id="{3FB3DE2C-26FA-44E2-8FFE-1D9F9E42AEE4}"/>
               </a:ext>
             </a:extLst>
           </p:cNvPr>
@@ -11776,7 +11776,7 @@
           <p:cNvPr id="10" name="">
             <a:extLst xmlns:a="http://schemas.openxmlformats.org/drawingml/2006/main">
               <a:ext uri="{FF2B5EF4-FFF2-40B4-BE49-F238E27FC236}">
-                <a16:creationId xmlns:a16="http://schemas.microsoft.com/office/drawing/2014/main" id="{4F5B23E0-FC5D-49AF-95E6-7653138D35FB}"/>
+                <a16:creationId xmlns:a16="http://schemas.microsoft.com/office/drawing/2014/main" id="{7D14BFA4-F5B2-4311-9804-1AE4AB1A63CE}"/>
               </a:ext>
             </a:extLst>
           </p:cNvPr>
@@ -11841,7 +11841,7 @@
           <p:nvPr/>
         </p:nvPicPr>
         <p:blipFill>
-          <a:blip xmlns:r="http://schemas.openxmlformats.org/officeDocument/2006/relationships" xmlns:a="http://schemas.openxmlformats.org/drawingml/2006/main" r:embed="R121293394ed042d1"/>
+          <a:blip xmlns:r="http://schemas.openxmlformats.org/officeDocument/2006/relationships" xmlns:a="http://schemas.openxmlformats.org/drawingml/2006/main" r:embed="R77ece7cc7e094ee8"/>
           <a:stretch xmlns:a="http://schemas.openxmlformats.org/drawingml/2006/main"/>
         </p:blipFill>
         <p:spPr>
@@ -11859,7 +11859,7 @@
           <p:cNvPr id="12" name="">
             <a:extLst xmlns:a="http://schemas.openxmlformats.org/drawingml/2006/main">
               <a:ext uri="{FF2B5EF4-FFF2-40B4-BE49-F238E27FC236}">
-                <a16:creationId xmlns:a16="http://schemas.microsoft.com/office/drawing/2014/main" id="{1D37320C-0820-42EB-B6FC-E5E07A04B11C}"/>
+                <a16:creationId xmlns:a16="http://schemas.microsoft.com/office/drawing/2014/main" id="{9B5A7B98-1353-49F1-B4FE-9E8D40803274}"/>
               </a:ext>
             </a:extLst>
           </p:cNvPr>
@@ -11920,7 +11920,7 @@
           <p:cNvPr id="13" name="">
             <a:extLst xmlns:a="http://schemas.openxmlformats.org/drawingml/2006/main">
               <a:ext uri="{FF2B5EF4-FFF2-40B4-BE49-F238E27FC236}">
-                <a16:creationId xmlns:a16="http://schemas.microsoft.com/office/drawing/2014/main" id="{2A201E9F-0087-4722-ABE7-F341F27F3A56}"/>
+                <a16:creationId xmlns:a16="http://schemas.microsoft.com/office/drawing/2014/main" id="{032DFA3B-35EC-4A6F-B728-926CF9D30D9D}"/>
               </a:ext>
             </a:extLst>
           </p:cNvPr>
@@ -11985,7 +11985,7 @@
           <p:nvPr/>
         </p:nvPicPr>
         <p:blipFill>
-          <a:blip xmlns:r="http://schemas.openxmlformats.org/officeDocument/2006/relationships" xmlns:a="http://schemas.openxmlformats.org/drawingml/2006/main" r:embed="R4073a862f1d14141"/>
+          <a:blip xmlns:r="http://schemas.openxmlformats.org/officeDocument/2006/relationships" xmlns:a="http://schemas.openxmlformats.org/drawingml/2006/main" r:embed="R832a97c73bf64be4"/>
           <a:stretch xmlns:a="http://schemas.openxmlformats.org/drawingml/2006/main"/>
         </p:blipFill>
         <p:spPr>
@@ -12003,7 +12003,7 @@
           <p:cNvPr id="15" name="">
             <a:extLst xmlns:a="http://schemas.openxmlformats.org/drawingml/2006/main">
               <a:ext uri="{FF2B5EF4-FFF2-40B4-BE49-F238E27FC236}">
-                <a16:creationId xmlns:a16="http://schemas.microsoft.com/office/drawing/2014/main" id="{38CE420C-55BE-4298-92D0-4667BF2E0210}"/>
+                <a16:creationId xmlns:a16="http://schemas.microsoft.com/office/drawing/2014/main" id="{B0D2B69F-AA8F-47FC-BBDD-A246913F74F7}"/>
               </a:ext>
             </a:extLst>
           </p:cNvPr>
@@ -12064,7 +12064,7 @@
           <p:cNvPr id="16" name="">
             <a:extLst xmlns:a="http://schemas.openxmlformats.org/drawingml/2006/main">
               <a:ext uri="{FF2B5EF4-FFF2-40B4-BE49-F238E27FC236}">
-                <a16:creationId xmlns:a16="http://schemas.microsoft.com/office/drawing/2014/main" id="{0CA03327-60B1-4F62-893B-F3BDB65B154D}"/>
+                <a16:creationId xmlns:a16="http://schemas.microsoft.com/office/drawing/2014/main" id="{AF4B85C2-C916-4E45-A353-642C018AD570}"/>
               </a:ext>
             </a:extLst>
           </p:cNvPr>
@@ -12125,7 +12125,7 @@
           <p:cNvPr id="17" name="">
             <a:extLst xmlns:a="http://schemas.openxmlformats.org/drawingml/2006/main">
               <a:ext uri="{FF2B5EF4-FFF2-40B4-BE49-F238E27FC236}">
-                <a16:creationId xmlns:a16="http://schemas.microsoft.com/office/drawing/2014/main" id="{BC67E4FE-B297-402F-8176-CFA7C74BD5EE}"/>
+                <a16:creationId xmlns:a16="http://schemas.microsoft.com/office/drawing/2014/main" id="{03373C92-B45E-4D5C-A288-58B659D9A1CB}"/>
               </a:ext>
             </a:extLst>
           </p:cNvPr>
@@ -12184,7 +12184,7 @@
     </p:spTree>
     <p:extLst>
       <p:ext uri="{BB962C8B-B14F-4D97-AF65-F5344CB8AC3E}">
-        <p14:creationId xmlns:p14="http://schemas.microsoft.com/office/powerpoint/2010/main" val="1720928882"/>
+        <p14:creationId xmlns:p14="http://schemas.microsoft.com/office/powerpoint/2010/main" val="441519590"/>
       </p:ext>
     </p:extLst>
   </p:cSld>
@@ -12215,7 +12215,7 @@
           <p:cNvPr id="27" name="">
             <a:extLst xmlns:a="http://schemas.openxmlformats.org/drawingml/2006/main">
               <a:ext uri="{FF2B5EF4-FFF2-40B4-BE49-F238E27FC236}">
-                <a16:creationId xmlns:a16="http://schemas.microsoft.com/office/drawing/2014/main" id="{81C4832C-C177-4D33-AE73-3D9F948C19BA}"/>
+                <a16:creationId xmlns:a16="http://schemas.microsoft.com/office/drawing/2014/main" id="{C519C909-1D55-4242-AD75-A3A1ABECEE3C}"/>
               </a:ext>
             </a:extLst>
           </p:cNvPr>
@@ -12276,7 +12276,7 @@
           <p:cNvPr id="2" name="">
             <a:extLst xmlns:a="http://schemas.openxmlformats.org/drawingml/2006/main">
               <a:ext uri="{FF2B5EF4-FFF2-40B4-BE49-F238E27FC236}">
-                <a16:creationId xmlns:a16="http://schemas.microsoft.com/office/drawing/2014/main" id="{8A57665A-5288-4CE5-ADDD-90C38E1B1BDB}"/>
+                <a16:creationId xmlns:a16="http://schemas.microsoft.com/office/drawing/2014/main" id="{E73DDAAF-B275-4885-8083-1235D769F143}"/>
               </a:ext>
             </a:extLst>
           </p:cNvPr>
@@ -12337,7 +12337,7 @@
           <p:cNvPr id="3" name="">
             <a:extLst xmlns:a="http://schemas.openxmlformats.org/drawingml/2006/main">
               <a:ext uri="{FF2B5EF4-FFF2-40B4-BE49-F238E27FC236}">
-                <a16:creationId xmlns:a16="http://schemas.microsoft.com/office/drawing/2014/main" id="{11F7EF5A-591C-4B2C-A417-9010C65A4E48}"/>
+                <a16:creationId xmlns:a16="http://schemas.microsoft.com/office/drawing/2014/main" id="{11807C75-EE7C-4ADB-8C41-055571D8D302}"/>
               </a:ext>
             </a:extLst>
           </p:cNvPr>
@@ -12398,7 +12398,7 @@
           <p:cNvPr id="4" name="">
             <a:extLst xmlns:a="http://schemas.openxmlformats.org/drawingml/2006/main">
               <a:ext uri="{FF2B5EF4-FFF2-40B4-BE49-F238E27FC236}">
-                <a16:creationId xmlns:a16="http://schemas.microsoft.com/office/drawing/2014/main" id="{C7177F4B-B8AA-42FE-AA60-7333567408FF}"/>
+                <a16:creationId xmlns:a16="http://schemas.microsoft.com/office/drawing/2014/main" id="{F17AE42A-E0A4-4263-B5ED-029C3C3D4815}"/>
               </a:ext>
             </a:extLst>
           </p:cNvPr>
@@ -12430,7 +12430,7 @@
           <p:cNvPr id="5" name="">
             <a:extLst xmlns:a="http://schemas.openxmlformats.org/drawingml/2006/main">
               <a:ext uri="{FF2B5EF4-FFF2-40B4-BE49-F238E27FC236}">
-                <a16:creationId xmlns:a16="http://schemas.microsoft.com/office/drawing/2014/main" id="{4678677F-3FD0-4D85-8D53-148184956459}"/>
+                <a16:creationId xmlns:a16="http://schemas.microsoft.com/office/drawing/2014/main" id="{971B3257-EF4A-4AB2-A46A-23E73E1C7CE4}"/>
               </a:ext>
             </a:extLst>
           </p:cNvPr>
@@ -12491,7 +12491,7 @@
           <p:cNvPr id="6" name="">
             <a:extLst xmlns:a="http://schemas.openxmlformats.org/drawingml/2006/main">
               <a:ext uri="{FF2B5EF4-FFF2-40B4-BE49-F238E27FC236}">
-                <a16:creationId xmlns:a16="http://schemas.microsoft.com/office/drawing/2014/main" id="{73455E7A-9185-4D50-84F3-61BD5FF60E1C}"/>
+                <a16:creationId xmlns:a16="http://schemas.microsoft.com/office/drawing/2014/main" id="{FB16290F-EBDC-4BCE-9D13-811DFE4DF468}"/>
               </a:ext>
             </a:extLst>
           </p:cNvPr>
@@ -12542,7 +12542,7 @@
                 <a:ea typeface="IBM Plex Sans KR"/>
                 <a:cs typeface="IBM Plex Sans KR"/>
               </a:rPr>
-              <a:t>교과서 04-1 · 5쪽</a:t>
+              <a:t>교과서 04-1 · 6쪽</a:t>
             </a:r>
           </a:p>
         </p:txBody>
@@ -12552,7 +12552,7 @@
           <p:cNvPr id="7" name="">
             <a:extLst xmlns:a="http://schemas.openxmlformats.org/drawingml/2006/main">
               <a:ext uri="{FF2B5EF4-FFF2-40B4-BE49-F238E27FC236}">
-                <a16:creationId xmlns:a16="http://schemas.microsoft.com/office/drawing/2014/main" id="{E41B8A31-8E25-4877-A199-3C018618682F}"/>
+                <a16:creationId xmlns:a16="http://schemas.microsoft.com/office/drawing/2014/main" id="{7573271A-DBC5-4FB7-8DCF-E17C7C74158D}"/>
               </a:ext>
             </a:extLst>
           </p:cNvPr>
@@ -12613,7 +12613,7 @@
           <p:cNvPr id="8" name="">
             <a:extLst xmlns:a="http://schemas.openxmlformats.org/drawingml/2006/main">
               <a:ext uri="{FF2B5EF4-FFF2-40B4-BE49-F238E27FC236}">
-                <a16:creationId xmlns:a16="http://schemas.microsoft.com/office/drawing/2014/main" id="{19CDE84F-9517-4F9C-98E1-5D3A3865E1D2}"/>
+                <a16:creationId xmlns:a16="http://schemas.microsoft.com/office/drawing/2014/main" id="{E4FE020B-B727-4B43-9851-D7AE4BD420BC}"/>
               </a:ext>
             </a:extLst>
           </p:cNvPr>
@@ -12813,7 +12813,7 @@
           <p:cNvPr id="9" name="">
             <a:extLst xmlns:a="http://schemas.openxmlformats.org/drawingml/2006/main">
               <a:ext uri="{FF2B5EF4-FFF2-40B4-BE49-F238E27FC236}">
-                <a16:creationId xmlns:a16="http://schemas.microsoft.com/office/drawing/2014/main" id="{2F4D8B67-72C9-47B7-A8BF-A87295D8C3EC}"/>
+                <a16:creationId xmlns:a16="http://schemas.microsoft.com/office/drawing/2014/main" id="{7E227D08-5270-4442-9C84-0E039EF26DD6}"/>
               </a:ext>
             </a:extLst>
           </p:cNvPr>
@@ -12847,7 +12847,7 @@
           <p:cNvPr id="10" name="">
             <a:extLst xmlns:a="http://schemas.openxmlformats.org/drawingml/2006/main">
               <a:ext uri="{FF2B5EF4-FFF2-40B4-BE49-F238E27FC236}">
-                <a16:creationId xmlns:a16="http://schemas.microsoft.com/office/drawing/2014/main" id="{FE61608A-0907-433F-B095-75D9BFB5064B}"/>
+                <a16:creationId xmlns:a16="http://schemas.microsoft.com/office/drawing/2014/main" id="{62D927BA-3B9A-49D6-A15C-FA32ABEFFB68}"/>
               </a:ext>
             </a:extLst>
           </p:cNvPr>
@@ -12908,7 +12908,7 @@
           <p:cNvPr id="11" name="">
             <a:extLst xmlns:a="http://schemas.openxmlformats.org/drawingml/2006/main">
               <a:ext uri="{FF2B5EF4-FFF2-40B4-BE49-F238E27FC236}">
-                <a16:creationId xmlns:a16="http://schemas.microsoft.com/office/drawing/2014/main" id="{1C8B25A1-2F4A-4315-A84E-AE795AE848F2}"/>
+                <a16:creationId xmlns:a16="http://schemas.microsoft.com/office/drawing/2014/main" id="{C2F6B9BB-E913-401B-86FE-76C7AFCE1F4C}"/>
               </a:ext>
             </a:extLst>
           </p:cNvPr>
@@ -12996,7 +12996,7 @@
           <p:cNvPr id="12" name="">
             <a:extLst xmlns:a="http://schemas.openxmlformats.org/drawingml/2006/main">
               <a:ext uri="{FF2B5EF4-FFF2-40B4-BE49-F238E27FC236}">
-                <a16:creationId xmlns:a16="http://schemas.microsoft.com/office/drawing/2014/main" id="{F5675883-DAA3-48FA-9853-F9E48685C148}"/>
+                <a16:creationId xmlns:a16="http://schemas.microsoft.com/office/drawing/2014/main" id="{73289963-FCF2-4D5F-BB56-A11F9EBAEFA4}"/>
               </a:ext>
             </a:extLst>
           </p:cNvPr>
@@ -13030,7 +13030,7 @@
           <p:cNvPr id="13" name="">
             <a:extLst xmlns:a="http://schemas.openxmlformats.org/drawingml/2006/main">
               <a:ext uri="{FF2B5EF4-FFF2-40B4-BE49-F238E27FC236}">
-                <a16:creationId xmlns:a16="http://schemas.microsoft.com/office/drawing/2014/main" id="{52230617-3A1E-46C3-8674-72DF4742312B}"/>
+                <a16:creationId xmlns:a16="http://schemas.microsoft.com/office/drawing/2014/main" id="{169326B1-34C8-4EE4-8640-29E71D1DDDB3}"/>
               </a:ext>
             </a:extLst>
           </p:cNvPr>
@@ -13091,7 +13091,7 @@
           <p:cNvPr id="14" name="">
             <a:extLst xmlns:a="http://schemas.openxmlformats.org/drawingml/2006/main">
               <a:ext uri="{FF2B5EF4-FFF2-40B4-BE49-F238E27FC236}">
-                <a16:creationId xmlns:a16="http://schemas.microsoft.com/office/drawing/2014/main" id="{F5CCCA08-3084-41F7-A824-4182B2616975}"/>
+                <a16:creationId xmlns:a16="http://schemas.microsoft.com/office/drawing/2014/main" id="{87BB9378-A2D3-4034-80DE-A14D3F36A777}"/>
               </a:ext>
             </a:extLst>
           </p:cNvPr>
@@ -13179,7 +13179,7 @@
           <p:cNvPr id="15" name="">
             <a:extLst xmlns:a="http://schemas.openxmlformats.org/drawingml/2006/main">
               <a:ext uri="{FF2B5EF4-FFF2-40B4-BE49-F238E27FC236}">
-                <a16:creationId xmlns:a16="http://schemas.microsoft.com/office/drawing/2014/main" id="{E20587EB-E476-47D1-A3F3-CFF2472B85B5}"/>
+                <a16:creationId xmlns:a16="http://schemas.microsoft.com/office/drawing/2014/main" id="{D528ECE5-AA12-4605-9A45-21FF0B5BBB8B}"/>
               </a:ext>
             </a:extLst>
           </p:cNvPr>
@@ -13213,7 +13213,7 @@
           <p:cNvPr id="16" name="">
             <a:extLst xmlns:a="http://schemas.openxmlformats.org/drawingml/2006/main">
               <a:ext uri="{FF2B5EF4-FFF2-40B4-BE49-F238E27FC236}">
-                <a16:creationId xmlns:a16="http://schemas.microsoft.com/office/drawing/2014/main" id="{1C5639DF-DAC6-42EA-B577-FCC814A47C88}"/>
+                <a16:creationId xmlns:a16="http://schemas.microsoft.com/office/drawing/2014/main" id="{B644F99D-0376-4499-ACAD-0B939C88AE72}"/>
               </a:ext>
             </a:extLst>
           </p:cNvPr>
@@ -13274,7 +13274,7 @@
           <p:cNvPr id="17" name="">
             <a:extLst xmlns:a="http://schemas.openxmlformats.org/drawingml/2006/main">
               <a:ext uri="{FF2B5EF4-FFF2-40B4-BE49-F238E27FC236}">
-                <a16:creationId xmlns:a16="http://schemas.microsoft.com/office/drawing/2014/main" id="{46C95FF0-0199-4210-BE14-A539D47B8DA9}"/>
+                <a16:creationId xmlns:a16="http://schemas.microsoft.com/office/drawing/2014/main" id="{C38F1541-E736-4B12-A6C2-F41A13B53AFC}"/>
               </a:ext>
             </a:extLst>
           </p:cNvPr>
@@ -13335,7 +13335,7 @@
           <p:cNvPr id="18" name="">
             <a:extLst xmlns:a="http://schemas.openxmlformats.org/drawingml/2006/main">
               <a:ext uri="{FF2B5EF4-FFF2-40B4-BE49-F238E27FC236}">
-                <a16:creationId xmlns:a16="http://schemas.microsoft.com/office/drawing/2014/main" id="{31A3E078-F621-42FA-9C5E-AAF1851870FA}"/>
+                <a16:creationId xmlns:a16="http://schemas.microsoft.com/office/drawing/2014/main" id="{13E628F1-E394-4246-818E-A330A9339CD4}"/>
               </a:ext>
             </a:extLst>
           </p:cNvPr>
@@ -13396,7 +13396,7 @@
           <p:cNvPr id="19" name="">
             <a:extLst xmlns:a="http://schemas.openxmlformats.org/drawingml/2006/main">
               <a:ext uri="{FF2B5EF4-FFF2-40B4-BE49-F238E27FC236}">
-                <a16:creationId xmlns:a16="http://schemas.microsoft.com/office/drawing/2014/main" id="{25881E51-41A1-4246-8AD2-4A0BF40A0E5E}"/>
+                <a16:creationId xmlns:a16="http://schemas.microsoft.com/office/drawing/2014/main" id="{0D9AD6B8-C371-47C6-B85D-FE03D1F1F049}"/>
               </a:ext>
             </a:extLst>
           </p:cNvPr>
@@ -13430,7 +13430,7 @@
           <p:cNvPr id="20" name="">
             <a:extLst xmlns:a="http://schemas.openxmlformats.org/drawingml/2006/main">
               <a:ext uri="{FF2B5EF4-FFF2-40B4-BE49-F238E27FC236}">
-                <a16:creationId xmlns:a16="http://schemas.microsoft.com/office/drawing/2014/main" id="{50C020F2-3FA1-448F-9CC0-EB22507987D5}"/>
+                <a16:creationId xmlns:a16="http://schemas.microsoft.com/office/drawing/2014/main" id="{35591B82-EA73-4147-9267-AD5544D2FE30}"/>
               </a:ext>
             </a:extLst>
           </p:cNvPr>
@@ -13491,7 +13491,7 @@
           <p:cNvPr id="21" name="">
             <a:extLst xmlns:a="http://schemas.openxmlformats.org/drawingml/2006/main">
               <a:ext uri="{FF2B5EF4-FFF2-40B4-BE49-F238E27FC236}">
-                <a16:creationId xmlns:a16="http://schemas.microsoft.com/office/drawing/2014/main" id="{03F5F1E3-3590-406A-ACE6-F7AA92E26BD1}"/>
+                <a16:creationId xmlns:a16="http://schemas.microsoft.com/office/drawing/2014/main" id="{1E74C440-C7C5-44EA-A60E-E137DFA5DC36}"/>
               </a:ext>
             </a:extLst>
           </p:cNvPr>
@@ -13552,7 +13552,7 @@
           <p:cNvPr id="22" name="">
             <a:extLst xmlns:a="http://schemas.openxmlformats.org/drawingml/2006/main">
               <a:ext uri="{FF2B5EF4-FFF2-40B4-BE49-F238E27FC236}">
-                <a16:creationId xmlns:a16="http://schemas.microsoft.com/office/drawing/2014/main" id="{DD4B2945-DA59-4F56-BFDC-B02E6AB2899E}"/>
+                <a16:creationId xmlns:a16="http://schemas.microsoft.com/office/drawing/2014/main" id="{62EAB25A-D139-42E0-A316-E4B067B38890}"/>
               </a:ext>
             </a:extLst>
           </p:cNvPr>
@@ -13613,7 +13613,7 @@
           <p:cNvPr id="23" name="">
             <a:extLst xmlns:a="http://schemas.openxmlformats.org/drawingml/2006/main">
               <a:ext uri="{FF2B5EF4-FFF2-40B4-BE49-F238E27FC236}">
-                <a16:creationId xmlns:a16="http://schemas.microsoft.com/office/drawing/2014/main" id="{04E4C7CE-89EF-4BF5-B195-70F4CAF1D016}"/>
+                <a16:creationId xmlns:a16="http://schemas.microsoft.com/office/drawing/2014/main" id="{3C66CDF4-CAC8-4F71-8996-C1657402FFFE}"/>
               </a:ext>
             </a:extLst>
           </p:cNvPr>
@@ -13647,7 +13647,7 @@
           <p:cNvPr id="24" name="">
             <a:extLst xmlns:a="http://schemas.openxmlformats.org/drawingml/2006/main">
               <a:ext uri="{FF2B5EF4-FFF2-40B4-BE49-F238E27FC236}">
-                <a16:creationId xmlns:a16="http://schemas.microsoft.com/office/drawing/2014/main" id="{3D442769-C85D-4EA0-999A-8A704EC9024A}"/>
+                <a16:creationId xmlns:a16="http://schemas.microsoft.com/office/drawing/2014/main" id="{0FA030CC-5AFE-4424-90A0-BE47055056F0}"/>
               </a:ext>
             </a:extLst>
           </p:cNvPr>
@@ -13708,7 +13708,7 @@
           <p:cNvPr id="25" name="">
             <a:extLst xmlns:a="http://schemas.openxmlformats.org/drawingml/2006/main">
               <a:ext uri="{FF2B5EF4-FFF2-40B4-BE49-F238E27FC236}">
-                <a16:creationId xmlns:a16="http://schemas.microsoft.com/office/drawing/2014/main" id="{C65745DD-90F6-4ECE-9AAC-3A99FB10D411}"/>
+                <a16:creationId xmlns:a16="http://schemas.microsoft.com/office/drawing/2014/main" id="{802D6908-CCD6-4CCC-A7E7-624003B5760B}"/>
               </a:ext>
             </a:extLst>
           </p:cNvPr>
@@ -13769,7 +13769,7 @@
           <p:cNvPr id="26" name="">
             <a:extLst xmlns:a="http://schemas.openxmlformats.org/drawingml/2006/main">
               <a:ext uri="{FF2B5EF4-FFF2-40B4-BE49-F238E27FC236}">
-                <a16:creationId xmlns:a16="http://schemas.microsoft.com/office/drawing/2014/main" id="{439AA53E-563E-4890-925A-C704AC3B54D5}"/>
+                <a16:creationId xmlns:a16="http://schemas.microsoft.com/office/drawing/2014/main" id="{A82533A8-86CC-404B-AFC0-1876E6FB4072}"/>
               </a:ext>
             </a:extLst>
           </p:cNvPr>
@@ -13828,7 +13828,7 @@
     </p:spTree>
     <p:extLst>
       <p:ext uri="{BB962C8B-B14F-4D97-AF65-F5344CB8AC3E}">
-        <p14:creationId xmlns:p14="http://schemas.microsoft.com/office/powerpoint/2010/main" val="1790582037"/>
+        <p14:creationId xmlns:p14="http://schemas.microsoft.com/office/powerpoint/2010/main" val="1289217564"/>
       </p:ext>
     </p:extLst>
   </p:cSld>
@@ -13859,7 +13859,7 @@
           <p:cNvPr id="16" name="">
             <a:extLst xmlns:a="http://schemas.openxmlformats.org/drawingml/2006/main">
               <a:ext uri="{FF2B5EF4-FFF2-40B4-BE49-F238E27FC236}">
-                <a16:creationId xmlns:a16="http://schemas.microsoft.com/office/drawing/2014/main" id="{C6C566BD-DB5A-4F21-83AC-E5D4F79A15D7}"/>
+                <a16:creationId xmlns:a16="http://schemas.microsoft.com/office/drawing/2014/main" id="{4E058CFA-412E-45FB-9966-D4973D01F345}"/>
               </a:ext>
             </a:extLst>
           </p:cNvPr>
@@ -13920,7 +13920,7 @@
           <p:cNvPr id="2" name="">
             <a:extLst xmlns:a="http://schemas.openxmlformats.org/drawingml/2006/main">
               <a:ext uri="{FF2B5EF4-FFF2-40B4-BE49-F238E27FC236}">
-                <a16:creationId xmlns:a16="http://schemas.microsoft.com/office/drawing/2014/main" id="{05607230-9028-4A07-B69A-659BD606BE19}"/>
+                <a16:creationId xmlns:a16="http://schemas.microsoft.com/office/drawing/2014/main" id="{584A0077-C7F7-4063-B33D-38CC23865BCB}"/>
               </a:ext>
             </a:extLst>
           </p:cNvPr>
@@ -13981,7 +13981,7 @@
           <p:cNvPr id="3" name="">
             <a:extLst xmlns:a="http://schemas.openxmlformats.org/drawingml/2006/main">
               <a:ext uri="{FF2B5EF4-FFF2-40B4-BE49-F238E27FC236}">
-                <a16:creationId xmlns:a16="http://schemas.microsoft.com/office/drawing/2014/main" id="{F5146D39-51B7-4DCF-8263-52828CF4002A}"/>
+                <a16:creationId xmlns:a16="http://schemas.microsoft.com/office/drawing/2014/main" id="{3D7E8D07-E184-4092-B0CF-F13B37CD0587}"/>
               </a:ext>
             </a:extLst>
           </p:cNvPr>
@@ -14042,7 +14042,7 @@
           <p:cNvPr id="4" name="">
             <a:extLst xmlns:a="http://schemas.openxmlformats.org/drawingml/2006/main">
               <a:ext uri="{FF2B5EF4-FFF2-40B4-BE49-F238E27FC236}">
-                <a16:creationId xmlns:a16="http://schemas.microsoft.com/office/drawing/2014/main" id="{EB0EB92C-58E7-4C24-9E57-1A7E53C4B869}"/>
+                <a16:creationId xmlns:a16="http://schemas.microsoft.com/office/drawing/2014/main" id="{07158698-5A3F-49BE-B8D0-593603FC84B7}"/>
               </a:ext>
             </a:extLst>
           </p:cNvPr>
@@ -14074,7 +14074,7 @@
           <p:cNvPr id="5" name="">
             <a:extLst xmlns:a="http://schemas.openxmlformats.org/drawingml/2006/main">
               <a:ext uri="{FF2B5EF4-FFF2-40B4-BE49-F238E27FC236}">
-                <a16:creationId xmlns:a16="http://schemas.microsoft.com/office/drawing/2014/main" id="{A4224E01-1851-48B9-9268-4BFA1133EAA1}"/>
+                <a16:creationId xmlns:a16="http://schemas.microsoft.com/office/drawing/2014/main" id="{70991DA7-D04E-40A1-B003-FC4D9CD69755}"/>
               </a:ext>
             </a:extLst>
           </p:cNvPr>
@@ -14135,7 +14135,7 @@
           <p:cNvPr id="6" name="">
             <a:extLst xmlns:a="http://schemas.openxmlformats.org/drawingml/2006/main">
               <a:ext uri="{FF2B5EF4-FFF2-40B4-BE49-F238E27FC236}">
-                <a16:creationId xmlns:a16="http://schemas.microsoft.com/office/drawing/2014/main" id="{FB083F85-67CD-45EF-9D23-5FD9A9B93F5A}"/>
+                <a16:creationId xmlns:a16="http://schemas.microsoft.com/office/drawing/2014/main" id="{D59D9D6C-A396-470E-869F-99F7EB5E4822}"/>
               </a:ext>
             </a:extLst>
           </p:cNvPr>
@@ -14186,7 +14186,7 @@
                 <a:ea typeface="IBM Plex Sans KR"/>
                 <a:cs typeface="IBM Plex Sans KR"/>
               </a:rPr>
-              <a:t>교과서 04-1 · 6쪽</a:t>
+              <a:t>교과서 04-1 · 7쪽</a:t>
             </a:r>
           </a:p>
         </p:txBody>
@@ -14196,7 +14196,7 @@
           <p:cNvPr id="7" name="">
             <a:extLst xmlns:a="http://schemas.openxmlformats.org/drawingml/2006/main">
               <a:ext uri="{FF2B5EF4-FFF2-40B4-BE49-F238E27FC236}">
-                <a16:creationId xmlns:a16="http://schemas.microsoft.com/office/drawing/2014/main" id="{1D643E6B-9AAE-45D8-989B-5F9F47B34B7B}"/>
+                <a16:creationId xmlns:a16="http://schemas.microsoft.com/office/drawing/2014/main" id="{20FB1C9A-C803-486B-B655-F72C3E6F991D}"/>
               </a:ext>
             </a:extLst>
           </p:cNvPr>
@@ -14261,7 +14261,7 @@
           <p:nvPr/>
         </p:nvPicPr>
         <p:blipFill>
-          <a:blip xmlns:r="http://schemas.openxmlformats.org/officeDocument/2006/relationships" xmlns:a="http://schemas.openxmlformats.org/drawingml/2006/main" r:embed="R4b4b788ed9684793"/>
+          <a:blip xmlns:r="http://schemas.openxmlformats.org/officeDocument/2006/relationships" xmlns:a="http://schemas.openxmlformats.org/drawingml/2006/main" r:embed="Rd7289141366247e1"/>
           <a:stretch xmlns:a="http://schemas.openxmlformats.org/drawingml/2006/main"/>
         </p:blipFill>
         <p:spPr>
@@ -14279,7 +14279,7 @@
           <p:cNvPr id="9" name="">
             <a:extLst xmlns:a="http://schemas.openxmlformats.org/drawingml/2006/main">
               <a:ext uri="{FF2B5EF4-FFF2-40B4-BE49-F238E27FC236}">
-                <a16:creationId xmlns:a16="http://schemas.microsoft.com/office/drawing/2014/main" id="{1C336951-49DC-4486-BD8C-824C6A7076CA}"/>
+                <a16:creationId xmlns:a16="http://schemas.microsoft.com/office/drawing/2014/main" id="{8B767D2D-3D11-4388-BE8E-586F694793AD}"/>
               </a:ext>
             </a:extLst>
           </p:cNvPr>
@@ -14313,7 +14313,7 @@
           <p:cNvPr id="10" name="">
             <a:extLst xmlns:a="http://schemas.openxmlformats.org/drawingml/2006/main">
               <a:ext uri="{FF2B5EF4-FFF2-40B4-BE49-F238E27FC236}">
-                <a16:creationId xmlns:a16="http://schemas.microsoft.com/office/drawing/2014/main" id="{59E215C9-A653-48E9-85DE-2FD694EC31C7}"/>
+                <a16:creationId xmlns:a16="http://schemas.microsoft.com/office/drawing/2014/main" id="{9436DD2C-8AC9-4D8F-A4C8-8A60AD54F4A6}"/>
               </a:ext>
             </a:extLst>
           </p:cNvPr>
@@ -14374,7 +14374,7 @@
           <p:cNvPr id="11" name="">
             <a:extLst xmlns:a="http://schemas.openxmlformats.org/drawingml/2006/main">
               <a:ext uri="{FF2B5EF4-FFF2-40B4-BE49-F238E27FC236}">
-                <a16:creationId xmlns:a16="http://schemas.microsoft.com/office/drawing/2014/main" id="{F2025AB3-CF1E-49A8-B6BA-61AFB16E1A0A}"/>
+                <a16:creationId xmlns:a16="http://schemas.microsoft.com/office/drawing/2014/main" id="{BE8B7007-3500-4878-95F2-7A16EA5E9F1A}"/>
               </a:ext>
             </a:extLst>
           </p:cNvPr>
@@ -14435,7 +14435,7 @@
           <p:cNvPr id="12" name="">
             <a:extLst xmlns:a="http://schemas.openxmlformats.org/drawingml/2006/main">
               <a:ext uri="{FF2B5EF4-FFF2-40B4-BE49-F238E27FC236}">
-                <a16:creationId xmlns:a16="http://schemas.microsoft.com/office/drawing/2014/main" id="{187F5A25-C85E-4860-A3C2-EE9AA8491A89}"/>
+                <a16:creationId xmlns:a16="http://schemas.microsoft.com/office/drawing/2014/main" id="{7552F2C1-3EBB-401F-8C6C-82E130455DCE}"/>
               </a:ext>
             </a:extLst>
           </p:cNvPr>
@@ -14469,7 +14469,7 @@
           <p:cNvPr id="13" name="">
             <a:extLst xmlns:a="http://schemas.openxmlformats.org/drawingml/2006/main">
               <a:ext uri="{FF2B5EF4-FFF2-40B4-BE49-F238E27FC236}">
-                <a16:creationId xmlns:a16="http://schemas.microsoft.com/office/drawing/2014/main" id="{049EB430-4F47-40CC-AD22-6EEC095593E4}"/>
+                <a16:creationId xmlns:a16="http://schemas.microsoft.com/office/drawing/2014/main" id="{7A766A8E-942F-4BE8-BF1D-61462EFB84C7}"/>
               </a:ext>
             </a:extLst>
           </p:cNvPr>
@@ -14530,7 +14530,7 @@
           <p:cNvPr id="14" name="">
             <a:extLst xmlns:a="http://schemas.openxmlformats.org/drawingml/2006/main">
               <a:ext uri="{FF2B5EF4-FFF2-40B4-BE49-F238E27FC236}">
-                <a16:creationId xmlns:a16="http://schemas.microsoft.com/office/drawing/2014/main" id="{63A75233-C304-43AE-B8DD-5F18E6F16E56}"/>
+                <a16:creationId xmlns:a16="http://schemas.microsoft.com/office/drawing/2014/main" id="{38692CE3-E007-4948-84C7-ABA2E53B4109}"/>
               </a:ext>
             </a:extLst>
           </p:cNvPr>
@@ -14591,7 +14591,7 @@
           <p:cNvPr id="15" name="">
             <a:extLst xmlns:a="http://schemas.openxmlformats.org/drawingml/2006/main">
               <a:ext uri="{FF2B5EF4-FFF2-40B4-BE49-F238E27FC236}">
-                <a16:creationId xmlns:a16="http://schemas.microsoft.com/office/drawing/2014/main" id="{9A413704-D818-4BC3-9737-B70A21B9C6FB}"/>
+                <a16:creationId xmlns:a16="http://schemas.microsoft.com/office/drawing/2014/main" id="{7D7BCD62-C2E9-4A86-9240-F03C2EC65DA9}"/>
               </a:ext>
             </a:extLst>
           </p:cNvPr>
@@ -14650,7 +14650,7 @@
     </p:spTree>
     <p:extLst>
       <p:ext uri="{BB962C8B-B14F-4D97-AF65-F5344CB8AC3E}">
-        <p14:creationId xmlns:p14="http://schemas.microsoft.com/office/powerpoint/2010/main" val="1640601562"/>
+        <p14:creationId xmlns:p14="http://schemas.microsoft.com/office/powerpoint/2010/main" val="1012819925"/>
       </p:ext>
     </p:extLst>
   </p:cSld>
@@ -14681,7 +14681,7 @@
           <p:cNvPr id="18" name="">
             <a:extLst xmlns:a="http://schemas.openxmlformats.org/drawingml/2006/main">
               <a:ext uri="{FF2B5EF4-FFF2-40B4-BE49-F238E27FC236}">
-                <a16:creationId xmlns:a16="http://schemas.microsoft.com/office/drawing/2014/main" id="{11DEFCA2-8004-4A76-9723-9A6F2FA8DFA6}"/>
+                <a16:creationId xmlns:a16="http://schemas.microsoft.com/office/drawing/2014/main" id="{F9514006-54B1-4F4E-A0A5-3604E4E5DA2D}"/>
               </a:ext>
             </a:extLst>
           </p:cNvPr>
@@ -14742,7 +14742,7 @@
           <p:cNvPr id="2" name="">
             <a:extLst xmlns:a="http://schemas.openxmlformats.org/drawingml/2006/main">
               <a:ext uri="{FF2B5EF4-FFF2-40B4-BE49-F238E27FC236}">
-                <a16:creationId xmlns:a16="http://schemas.microsoft.com/office/drawing/2014/main" id="{595F34B3-5AA5-482F-9154-CC1E4A483CE5}"/>
+                <a16:creationId xmlns:a16="http://schemas.microsoft.com/office/drawing/2014/main" id="{5E67AFDE-A0D8-4882-B6B7-CBBB86641768}"/>
               </a:ext>
             </a:extLst>
           </p:cNvPr>
@@ -14803,7 +14803,7 @@
           <p:cNvPr id="3" name="">
             <a:extLst xmlns:a="http://schemas.openxmlformats.org/drawingml/2006/main">
               <a:ext uri="{FF2B5EF4-FFF2-40B4-BE49-F238E27FC236}">
-                <a16:creationId xmlns:a16="http://schemas.microsoft.com/office/drawing/2014/main" id="{323740F9-DDF1-4845-B8E7-5269442CB5F8}"/>
+                <a16:creationId xmlns:a16="http://schemas.microsoft.com/office/drawing/2014/main" id="{DC9B4226-7CDE-45F1-8042-0CEC1DAEFD20}"/>
               </a:ext>
             </a:extLst>
           </p:cNvPr>
@@ -14864,7 +14864,7 @@
           <p:cNvPr id="4" name="">
             <a:extLst xmlns:a="http://schemas.openxmlformats.org/drawingml/2006/main">
               <a:ext uri="{FF2B5EF4-FFF2-40B4-BE49-F238E27FC236}">
-                <a16:creationId xmlns:a16="http://schemas.microsoft.com/office/drawing/2014/main" id="{89F9E3BA-BD5E-4501-9D03-3CB1BD46F15D}"/>
+                <a16:creationId xmlns:a16="http://schemas.microsoft.com/office/drawing/2014/main" id="{D89C8460-9017-45BE-A5EB-01C728DE082E}"/>
               </a:ext>
             </a:extLst>
           </p:cNvPr>
@@ -14896,7 +14896,7 @@
           <p:cNvPr id="5" name="">
             <a:extLst xmlns:a="http://schemas.openxmlformats.org/drawingml/2006/main">
               <a:ext uri="{FF2B5EF4-FFF2-40B4-BE49-F238E27FC236}">
-                <a16:creationId xmlns:a16="http://schemas.microsoft.com/office/drawing/2014/main" id="{80BB49E8-AFBC-442B-8B9E-508834A894BC}"/>
+                <a16:creationId xmlns:a16="http://schemas.microsoft.com/office/drawing/2014/main" id="{06309C81-D5B2-4665-B1DE-ADCAAF27EB8E}"/>
               </a:ext>
             </a:extLst>
           </p:cNvPr>
@@ -14957,7 +14957,7 @@
           <p:cNvPr id="6" name="">
             <a:extLst xmlns:a="http://schemas.openxmlformats.org/drawingml/2006/main">
               <a:ext uri="{FF2B5EF4-FFF2-40B4-BE49-F238E27FC236}">
-                <a16:creationId xmlns:a16="http://schemas.microsoft.com/office/drawing/2014/main" id="{DDF1C4C7-A0F3-4999-8F1B-519EE15AF912}"/>
+                <a16:creationId xmlns:a16="http://schemas.microsoft.com/office/drawing/2014/main" id="{55A2C31E-DDCB-40A1-8B0F-3EA360F1262A}"/>
               </a:ext>
             </a:extLst>
           </p:cNvPr>
@@ -15008,7 +15008,7 @@
                 <a:ea typeface="IBM Plex Sans KR"/>
                 <a:cs typeface="IBM Plex Sans KR"/>
               </a:rPr>
-              <a:t>교과서 04-1 · 7쪽</a:t>
+              <a:t>교과서 04-1 · 8–9쪽</a:t>
             </a:r>
           </a:p>
         </p:txBody>
@@ -15018,7 +15018,7 @@
           <p:cNvPr id="7" name="">
             <a:extLst xmlns:a="http://schemas.openxmlformats.org/drawingml/2006/main">
               <a:ext uri="{FF2B5EF4-FFF2-40B4-BE49-F238E27FC236}">
-                <a16:creationId xmlns:a16="http://schemas.microsoft.com/office/drawing/2014/main" id="{82C76306-483D-4CA6-971B-31436740A133}"/>
+                <a16:creationId xmlns:a16="http://schemas.microsoft.com/office/drawing/2014/main" id="{5086A360-574F-4FAF-B277-3C4968446EB8}"/>
               </a:ext>
             </a:extLst>
           </p:cNvPr>
@@ -15083,7 +15083,7 @@
           <p:nvPr/>
         </p:nvPicPr>
         <p:blipFill>
-          <a:blip xmlns:r="http://schemas.openxmlformats.org/officeDocument/2006/relationships" xmlns:a="http://schemas.openxmlformats.org/drawingml/2006/main" r:embed="Rf81b179ba37243fe"/>
+          <a:blip xmlns:r="http://schemas.openxmlformats.org/officeDocument/2006/relationships" xmlns:a="http://schemas.openxmlformats.org/drawingml/2006/main" r:embed="Rf01bdbd761264884"/>
           <a:stretch xmlns:a="http://schemas.openxmlformats.org/drawingml/2006/main"/>
         </p:blipFill>
         <p:spPr>
@@ -15101,7 +15101,7 @@
           <p:cNvPr id="9" name="">
             <a:extLst xmlns:a="http://schemas.openxmlformats.org/drawingml/2006/main">
               <a:ext uri="{FF2B5EF4-FFF2-40B4-BE49-F238E27FC236}">
-                <a16:creationId xmlns:a16="http://schemas.microsoft.com/office/drawing/2014/main" id="{49FC2659-FE78-46DA-A6A8-B0B952F59439}"/>
+                <a16:creationId xmlns:a16="http://schemas.microsoft.com/office/drawing/2014/main" id="{5D0A136D-74F3-4887-92F7-BA7A7B971458}"/>
               </a:ext>
             </a:extLst>
           </p:cNvPr>
@@ -15135,7 +15135,7 @@
           <p:cNvPr id="10" name="">
             <a:extLst xmlns:a="http://schemas.openxmlformats.org/drawingml/2006/main">
               <a:ext uri="{FF2B5EF4-FFF2-40B4-BE49-F238E27FC236}">
-                <a16:creationId xmlns:a16="http://schemas.microsoft.com/office/drawing/2014/main" id="{9970F4D9-CC87-494E-9265-FEC12C2FD092}"/>
+                <a16:creationId xmlns:a16="http://schemas.microsoft.com/office/drawing/2014/main" id="{D3793570-FE78-418F-A4AB-21256B8546D4}"/>
               </a:ext>
             </a:extLst>
           </p:cNvPr>
@@ -15196,7 +15196,7 @@
           <p:cNvPr id="11" name="">
             <a:extLst xmlns:a="http://schemas.openxmlformats.org/drawingml/2006/main">
               <a:ext uri="{FF2B5EF4-FFF2-40B4-BE49-F238E27FC236}">
-                <a16:creationId xmlns:a16="http://schemas.microsoft.com/office/drawing/2014/main" id="{E9C30CA1-F47D-42FD-B76E-86BFF3E10D04}"/>
+                <a16:creationId xmlns:a16="http://schemas.microsoft.com/office/drawing/2014/main" id="{3DB4174B-13CE-4430-A193-0CB5E5612199}"/>
               </a:ext>
             </a:extLst>
           </p:cNvPr>
@@ -15257,7 +15257,7 @@
           <p:cNvPr id="12" name="">
             <a:extLst xmlns:a="http://schemas.openxmlformats.org/drawingml/2006/main">
               <a:ext uri="{FF2B5EF4-FFF2-40B4-BE49-F238E27FC236}">
-                <a16:creationId xmlns:a16="http://schemas.microsoft.com/office/drawing/2014/main" id="{1BE0C975-E921-463F-BFF4-B9792EC5FC04}"/>
+                <a16:creationId xmlns:a16="http://schemas.microsoft.com/office/drawing/2014/main" id="{F4021F2C-D8C7-4F19-9CC4-4D2CE53789E4}"/>
               </a:ext>
             </a:extLst>
           </p:cNvPr>
@@ -15345,7 +15345,7 @@
           <p:cNvPr id="13" name="">
             <a:extLst xmlns:a="http://schemas.openxmlformats.org/drawingml/2006/main">
               <a:ext uri="{FF2B5EF4-FFF2-40B4-BE49-F238E27FC236}">
-                <a16:creationId xmlns:a16="http://schemas.microsoft.com/office/drawing/2014/main" id="{AF266C99-1B6F-4388-BE0B-373EC9FF9CCA}"/>
+                <a16:creationId xmlns:a16="http://schemas.microsoft.com/office/drawing/2014/main" id="{EB75B0E9-C4B5-42D0-A84D-321CFEA9C9DB}"/>
               </a:ext>
             </a:extLst>
           </p:cNvPr>
@@ -15379,7 +15379,7 @@
           <p:cNvPr id="14" name="">
             <a:extLst xmlns:a="http://schemas.openxmlformats.org/drawingml/2006/main">
               <a:ext uri="{FF2B5EF4-FFF2-40B4-BE49-F238E27FC236}">
-                <a16:creationId xmlns:a16="http://schemas.microsoft.com/office/drawing/2014/main" id="{9465A38B-9AC8-4095-B9DB-92D278C0EF98}"/>
+                <a16:creationId xmlns:a16="http://schemas.microsoft.com/office/drawing/2014/main" id="{E9F2CE26-B9B6-4ADC-853A-273C2A681D64}"/>
               </a:ext>
             </a:extLst>
           </p:cNvPr>
@@ -15440,7 +15440,7 @@
           <p:cNvPr id="15" name="">
             <a:extLst xmlns:a="http://schemas.openxmlformats.org/drawingml/2006/main">
               <a:ext uri="{FF2B5EF4-FFF2-40B4-BE49-F238E27FC236}">
-                <a16:creationId xmlns:a16="http://schemas.microsoft.com/office/drawing/2014/main" id="{DD3F646E-1B26-4239-849D-99FDBA11DC55}"/>
+                <a16:creationId xmlns:a16="http://schemas.microsoft.com/office/drawing/2014/main" id="{8AD90C8D-ADA3-457E-8EC0-C0A6A36A50FA}"/>
               </a:ext>
             </a:extLst>
           </p:cNvPr>
@@ -15501,7 +15501,7 @@
           <p:cNvPr id="16" name="">
             <a:extLst xmlns:a="http://schemas.openxmlformats.org/drawingml/2006/main">
               <a:ext uri="{FF2B5EF4-FFF2-40B4-BE49-F238E27FC236}">
-                <a16:creationId xmlns:a16="http://schemas.microsoft.com/office/drawing/2014/main" id="{226DDF2C-7B68-4812-8A03-8670BD1CA8DC}"/>
+                <a16:creationId xmlns:a16="http://schemas.microsoft.com/office/drawing/2014/main" id="{9764F822-A117-46F3-8913-23F67151BA6B}"/>
               </a:ext>
             </a:extLst>
           </p:cNvPr>
@@ -15589,7 +15589,7 @@
           <p:cNvPr id="17" name="">
             <a:extLst xmlns:a="http://schemas.openxmlformats.org/drawingml/2006/main">
               <a:ext uri="{FF2B5EF4-FFF2-40B4-BE49-F238E27FC236}">
-                <a16:creationId xmlns:a16="http://schemas.microsoft.com/office/drawing/2014/main" id="{AF6162E9-447D-44E2-9323-635B41A4FC02}"/>
+                <a16:creationId xmlns:a16="http://schemas.microsoft.com/office/drawing/2014/main" id="{CEEDE1A0-B6C3-4FC2-92F8-9615F044BAFD}"/>
               </a:ext>
             </a:extLst>
           </p:cNvPr>
@@ -15648,7 +15648,7 @@
     </p:spTree>
     <p:extLst>
       <p:ext uri="{BB962C8B-B14F-4D97-AF65-F5344CB8AC3E}">
-        <p14:creationId xmlns:p14="http://schemas.microsoft.com/office/powerpoint/2010/main" val="696532549"/>
+        <p14:creationId xmlns:p14="http://schemas.microsoft.com/office/powerpoint/2010/main" val="1448922444"/>
       </p:ext>
     </p:extLst>
   </p:cSld>
@@ -15679,7 +15679,7 @@
           <p:cNvPr id="20" name="">
             <a:extLst xmlns:a="http://schemas.openxmlformats.org/drawingml/2006/main">
               <a:ext uri="{FF2B5EF4-FFF2-40B4-BE49-F238E27FC236}">
-                <a16:creationId xmlns:a16="http://schemas.microsoft.com/office/drawing/2014/main" id="{194623F8-BBF9-4C44-8429-4A137B5B0C9A}"/>
+                <a16:creationId xmlns:a16="http://schemas.microsoft.com/office/drawing/2014/main" id="{005412F2-E3C6-40D0-A10A-186DC95B5D5B}"/>
               </a:ext>
             </a:extLst>
           </p:cNvPr>
@@ -15740,7 +15740,7 @@
           <p:cNvPr id="2" name="">
             <a:extLst xmlns:a="http://schemas.openxmlformats.org/drawingml/2006/main">
               <a:ext uri="{FF2B5EF4-FFF2-40B4-BE49-F238E27FC236}">
-                <a16:creationId xmlns:a16="http://schemas.microsoft.com/office/drawing/2014/main" id="{0D9AABDD-B9E2-483D-919B-7FD0C6DB740A}"/>
+                <a16:creationId xmlns:a16="http://schemas.microsoft.com/office/drawing/2014/main" id="{9DD24FF3-F5AA-41EB-A5A4-A7656F2D0898}"/>
               </a:ext>
             </a:extLst>
           </p:cNvPr>
@@ -15801,7 +15801,7 @@
           <p:cNvPr id="3" name="">
             <a:extLst xmlns:a="http://schemas.openxmlformats.org/drawingml/2006/main">
               <a:ext uri="{FF2B5EF4-FFF2-40B4-BE49-F238E27FC236}">
-                <a16:creationId xmlns:a16="http://schemas.microsoft.com/office/drawing/2014/main" id="{4508FD23-15A6-46EB-B1C5-895A9B1417B8}"/>
+                <a16:creationId xmlns:a16="http://schemas.microsoft.com/office/drawing/2014/main" id="{FA2C559F-4A0A-41CE-9A82-D1689BAE9AEB}"/>
               </a:ext>
             </a:extLst>
           </p:cNvPr>
@@ -15862,7 +15862,7 @@
           <p:cNvPr id="4" name="">
             <a:extLst xmlns:a="http://schemas.openxmlformats.org/drawingml/2006/main">
               <a:ext uri="{FF2B5EF4-FFF2-40B4-BE49-F238E27FC236}">
-                <a16:creationId xmlns:a16="http://schemas.microsoft.com/office/drawing/2014/main" id="{A1532229-9410-453A-A5C2-81E53366D0DB}"/>
+                <a16:creationId xmlns:a16="http://schemas.microsoft.com/office/drawing/2014/main" id="{B1B3E62A-4596-4FDF-B883-E8FF8B52EEB2}"/>
               </a:ext>
             </a:extLst>
           </p:cNvPr>
@@ -15894,7 +15894,7 @@
           <p:cNvPr id="5" name="">
             <a:extLst xmlns:a="http://schemas.openxmlformats.org/drawingml/2006/main">
               <a:ext uri="{FF2B5EF4-FFF2-40B4-BE49-F238E27FC236}">
-                <a16:creationId xmlns:a16="http://schemas.microsoft.com/office/drawing/2014/main" id="{AB6AC40F-39E1-4AF5-84E7-E802BC7E06C7}"/>
+                <a16:creationId xmlns:a16="http://schemas.microsoft.com/office/drawing/2014/main" id="{A7CF74AA-B874-479E-9E66-0F108382ACE7}"/>
               </a:ext>
             </a:extLst>
           </p:cNvPr>
@@ -15955,7 +15955,7 @@
           <p:cNvPr id="6" name="">
             <a:extLst xmlns:a="http://schemas.openxmlformats.org/drawingml/2006/main">
               <a:ext uri="{FF2B5EF4-FFF2-40B4-BE49-F238E27FC236}">
-                <a16:creationId xmlns:a16="http://schemas.microsoft.com/office/drawing/2014/main" id="{9C64009A-0257-4BC2-970C-C18E359B5A17}"/>
+                <a16:creationId xmlns:a16="http://schemas.microsoft.com/office/drawing/2014/main" id="{72AE6E12-AA86-4F68-B2CB-46256B30995C}"/>
               </a:ext>
             </a:extLst>
           </p:cNvPr>
@@ -16006,7 +16006,7 @@
                 <a:ea typeface="IBM Plex Sans KR"/>
                 <a:cs typeface="IBM Plex Sans KR"/>
               </a:rPr>
-              <a:t>교과서 04-1 · 8쪽</a:t>
+              <a:t>교과서 04-1 · 10–11쪽</a:t>
             </a:r>
           </a:p>
         </p:txBody>
@@ -16016,7 +16016,7 @@
           <p:cNvPr id="7" name="">
             <a:extLst xmlns:a="http://schemas.openxmlformats.org/drawingml/2006/main">
               <a:ext uri="{FF2B5EF4-FFF2-40B4-BE49-F238E27FC236}">
-                <a16:creationId xmlns:a16="http://schemas.microsoft.com/office/drawing/2014/main" id="{A7D9298D-1E2C-4F33-964C-5274DA5C5479}"/>
+                <a16:creationId xmlns:a16="http://schemas.microsoft.com/office/drawing/2014/main" id="{302129FB-F259-4F2E-AD79-C797343D49FA}"/>
               </a:ext>
             </a:extLst>
           </p:cNvPr>
@@ -16077,7 +16077,7 @@
           <p:cNvPr id="8" name="">
             <a:extLst xmlns:a="http://schemas.openxmlformats.org/drawingml/2006/main">
               <a:ext uri="{FF2B5EF4-FFF2-40B4-BE49-F238E27FC236}">
-                <a16:creationId xmlns:a16="http://schemas.microsoft.com/office/drawing/2014/main" id="{D1680E1F-F274-4C4C-A394-89AD18288834}"/>
+                <a16:creationId xmlns:a16="http://schemas.microsoft.com/office/drawing/2014/main" id="{91ADE065-DF89-4A57-81B0-F4556626AA6F}"/>
               </a:ext>
             </a:extLst>
           </p:cNvPr>
@@ -16255,7 +16255,7 @@
           <p:cNvPr id="9" name="">
             <a:extLst xmlns:a="http://schemas.openxmlformats.org/drawingml/2006/main">
               <a:ext uri="{FF2B5EF4-FFF2-40B4-BE49-F238E27FC236}">
-                <a16:creationId xmlns:a16="http://schemas.microsoft.com/office/drawing/2014/main" id="{CB625BA3-2BC1-42EB-9967-09280A1C261A}"/>
+                <a16:creationId xmlns:a16="http://schemas.microsoft.com/office/drawing/2014/main" id="{BC71160C-D156-4AAE-9D6E-CE2C300D7EF7}"/>
               </a:ext>
             </a:extLst>
           </p:cNvPr>
@@ -16316,7 +16316,7 @@
           <p:cNvPr id="10" name="">
             <a:extLst xmlns:a="http://schemas.openxmlformats.org/drawingml/2006/main">
               <a:ext uri="{FF2B5EF4-FFF2-40B4-BE49-F238E27FC236}">
-                <a16:creationId xmlns:a16="http://schemas.microsoft.com/office/drawing/2014/main" id="{4E3DBB13-2CB4-4C5D-88F1-C16E696909B3}"/>
+                <a16:creationId xmlns:a16="http://schemas.microsoft.com/office/drawing/2014/main" id="{2A633FD5-764F-40EF-B7E5-F71A625B5076}"/>
               </a:ext>
             </a:extLst>
           </p:cNvPr>
@@ -16350,7 +16350,7 @@
           <p:cNvPr id="11" name="">
             <a:extLst xmlns:a="http://schemas.openxmlformats.org/drawingml/2006/main">
               <a:ext uri="{FF2B5EF4-FFF2-40B4-BE49-F238E27FC236}">
-                <a16:creationId xmlns:a16="http://schemas.microsoft.com/office/drawing/2014/main" id="{5E4C7059-CAEA-4BD5-9F89-E4DA207EE1FB}"/>
+                <a16:creationId xmlns:a16="http://schemas.microsoft.com/office/drawing/2014/main" id="{3DADDF41-71EB-4052-BC98-5EB5E1B3ED3B}"/>
               </a:ext>
             </a:extLst>
           </p:cNvPr>
@@ -16411,7 +16411,7 @@
           <p:cNvPr id="12" name="">
             <a:extLst xmlns:a="http://schemas.openxmlformats.org/drawingml/2006/main">
               <a:ext uri="{FF2B5EF4-FFF2-40B4-BE49-F238E27FC236}">
-                <a16:creationId xmlns:a16="http://schemas.microsoft.com/office/drawing/2014/main" id="{02EC4CB1-C9EE-41B4-A3D3-F5542C51AD27}"/>
+                <a16:creationId xmlns:a16="http://schemas.microsoft.com/office/drawing/2014/main" id="{A3FDCD30-270B-418C-8FA8-07573C6D563B}"/>
               </a:ext>
             </a:extLst>
           </p:cNvPr>
@@ -16472,7 +16472,7 @@
           <p:cNvPr id="13" name="">
             <a:extLst xmlns:a="http://schemas.openxmlformats.org/drawingml/2006/main">
               <a:ext uri="{FF2B5EF4-FFF2-40B4-BE49-F238E27FC236}">
-                <a16:creationId xmlns:a16="http://schemas.microsoft.com/office/drawing/2014/main" id="{0E4A9DEE-4A9F-4E05-8F03-706A95DEF279}"/>
+                <a16:creationId xmlns:a16="http://schemas.microsoft.com/office/drawing/2014/main" id="{8897E2DB-B140-46DD-84BC-0A517F7C32C5}"/>
               </a:ext>
             </a:extLst>
           </p:cNvPr>
@@ -16587,7 +16587,7 @@
           <p:cNvPr id="14" name="">
             <a:extLst xmlns:a="http://schemas.openxmlformats.org/drawingml/2006/main">
               <a:ext uri="{FF2B5EF4-FFF2-40B4-BE49-F238E27FC236}">
-                <a16:creationId xmlns:a16="http://schemas.microsoft.com/office/drawing/2014/main" id="{29768B96-5213-419A-8779-5B38CA94321A}"/>
+                <a16:creationId xmlns:a16="http://schemas.microsoft.com/office/drawing/2014/main" id="{88D604C7-408B-4E6D-B8DB-1D8773D83EA2}"/>
               </a:ext>
             </a:extLst>
           </p:cNvPr>
@@ -16648,7 +16648,7 @@
           <p:cNvPr id="15" name="">
             <a:extLst xmlns:a="http://schemas.openxmlformats.org/drawingml/2006/main">
               <a:ext uri="{FF2B5EF4-FFF2-40B4-BE49-F238E27FC236}">
-                <a16:creationId xmlns:a16="http://schemas.microsoft.com/office/drawing/2014/main" id="{B2C2E266-43B8-40A2-BE95-9FC96A60B187}"/>
+                <a16:creationId xmlns:a16="http://schemas.microsoft.com/office/drawing/2014/main" id="{3999C9A3-1D4D-4882-A65A-8F1EE7C5E9C4}"/>
               </a:ext>
             </a:extLst>
           </p:cNvPr>
@@ -16853,7 +16853,7 @@
           <p:cNvPr id="16" name="">
             <a:extLst xmlns:a="http://schemas.openxmlformats.org/drawingml/2006/main">
               <a:ext uri="{FF2B5EF4-FFF2-40B4-BE49-F238E27FC236}">
-                <a16:creationId xmlns:a16="http://schemas.microsoft.com/office/drawing/2014/main" id="{C6BF9305-8CAB-4F21-B402-7C7E496B0DCE}"/>
+                <a16:creationId xmlns:a16="http://schemas.microsoft.com/office/drawing/2014/main" id="{A4388B2A-A99E-4A45-9C9A-234D01239567}"/>
               </a:ext>
             </a:extLst>
           </p:cNvPr>
@@ -16887,7 +16887,7 @@
           <p:cNvPr id="17" name="">
             <a:extLst xmlns:a="http://schemas.openxmlformats.org/drawingml/2006/main">
               <a:ext uri="{FF2B5EF4-FFF2-40B4-BE49-F238E27FC236}">
-                <a16:creationId xmlns:a16="http://schemas.microsoft.com/office/drawing/2014/main" id="{FC638047-4C39-41FB-BAA2-C652A90DBE89}"/>
+                <a16:creationId xmlns:a16="http://schemas.microsoft.com/office/drawing/2014/main" id="{43FFDA8D-14D4-4005-8863-72BA5AA251DF}"/>
               </a:ext>
             </a:extLst>
           </p:cNvPr>
@@ -16948,7 +16948,7 @@
           <p:cNvPr id="18" name="">
             <a:extLst xmlns:a="http://schemas.openxmlformats.org/drawingml/2006/main">
               <a:ext uri="{FF2B5EF4-FFF2-40B4-BE49-F238E27FC236}">
-                <a16:creationId xmlns:a16="http://schemas.microsoft.com/office/drawing/2014/main" id="{2FB31DF9-B3E7-4346-8A91-2AA105AD1D6E}"/>
+                <a16:creationId xmlns:a16="http://schemas.microsoft.com/office/drawing/2014/main" id="{DEDB81F7-3F04-432E-AF30-6F082BA1E926}"/>
               </a:ext>
             </a:extLst>
           </p:cNvPr>
@@ -17009,7 +17009,7 @@
           <p:cNvPr id="19" name="">
             <a:extLst xmlns:a="http://schemas.openxmlformats.org/drawingml/2006/main">
               <a:ext uri="{FF2B5EF4-FFF2-40B4-BE49-F238E27FC236}">
-                <a16:creationId xmlns:a16="http://schemas.microsoft.com/office/drawing/2014/main" id="{D201DC08-1A6B-45AC-AC89-AC88C719F576}"/>
+                <a16:creationId xmlns:a16="http://schemas.microsoft.com/office/drawing/2014/main" id="{4D7678E8-A3C0-4B13-9574-74CD1617AE94}"/>
               </a:ext>
             </a:extLst>
           </p:cNvPr>
@@ -17068,7 +17068,7 @@
     </p:spTree>
     <p:extLst>
       <p:ext uri="{BB962C8B-B14F-4D97-AF65-F5344CB8AC3E}">
-        <p14:creationId xmlns:p14="http://schemas.microsoft.com/office/powerpoint/2010/main" val="1747636543"/>
+        <p14:creationId xmlns:p14="http://schemas.microsoft.com/office/powerpoint/2010/main" val="956118693"/>
       </p:ext>
     </p:extLst>
   </p:cSld>
@@ -17099,7 +17099,7 @@
           <p:cNvPr id="21" name="">
             <a:extLst xmlns:a="http://schemas.openxmlformats.org/drawingml/2006/main">
               <a:ext uri="{FF2B5EF4-FFF2-40B4-BE49-F238E27FC236}">
-                <a16:creationId xmlns:a16="http://schemas.microsoft.com/office/drawing/2014/main" id="{C3B7CBF9-47C3-4558-9146-C6391AD512E5}"/>
+                <a16:creationId xmlns:a16="http://schemas.microsoft.com/office/drawing/2014/main" id="{01DA1AA8-DB1D-408C-BA4A-9D013A86F20F}"/>
               </a:ext>
             </a:extLst>
           </p:cNvPr>
@@ -17160,7 +17160,7 @@
           <p:cNvPr id="2" name="">
             <a:extLst xmlns:a="http://schemas.openxmlformats.org/drawingml/2006/main">
               <a:ext uri="{FF2B5EF4-FFF2-40B4-BE49-F238E27FC236}">
-                <a16:creationId xmlns:a16="http://schemas.microsoft.com/office/drawing/2014/main" id="{606027F2-C675-4483-AE31-B0E3A5FFA32A}"/>
+                <a16:creationId xmlns:a16="http://schemas.microsoft.com/office/drawing/2014/main" id="{28558024-05E3-4F8D-8A81-E6965B102E4D}"/>
               </a:ext>
             </a:extLst>
           </p:cNvPr>
@@ -17221,7 +17221,7 @@
           <p:cNvPr id="3" name="">
             <a:extLst xmlns:a="http://schemas.openxmlformats.org/drawingml/2006/main">
               <a:ext uri="{FF2B5EF4-FFF2-40B4-BE49-F238E27FC236}">
-                <a16:creationId xmlns:a16="http://schemas.microsoft.com/office/drawing/2014/main" id="{447F8DCD-A96F-4E75-A8FC-EAA13F290CFE}"/>
+                <a16:creationId xmlns:a16="http://schemas.microsoft.com/office/drawing/2014/main" id="{F639D156-9209-4940-B799-7EFE4C9A28DC}"/>
               </a:ext>
             </a:extLst>
           </p:cNvPr>
@@ -17282,7 +17282,7 @@
           <p:cNvPr id="4" name="">
             <a:extLst xmlns:a="http://schemas.openxmlformats.org/drawingml/2006/main">
               <a:ext uri="{FF2B5EF4-FFF2-40B4-BE49-F238E27FC236}">
-                <a16:creationId xmlns:a16="http://schemas.microsoft.com/office/drawing/2014/main" id="{DD65B62A-CC48-4DD5-A02E-3E202A68E6BC}"/>
+                <a16:creationId xmlns:a16="http://schemas.microsoft.com/office/drawing/2014/main" id="{E32F9EBB-B6BF-41E1-9B49-23BB66F6D7D1}"/>
               </a:ext>
             </a:extLst>
           </p:cNvPr>
@@ -17314,7 +17314,7 @@
           <p:cNvPr id="5" name="">
             <a:extLst xmlns:a="http://schemas.openxmlformats.org/drawingml/2006/main">
               <a:ext uri="{FF2B5EF4-FFF2-40B4-BE49-F238E27FC236}">
-                <a16:creationId xmlns:a16="http://schemas.microsoft.com/office/drawing/2014/main" id="{ACDE3174-CF1B-4599-89A4-A23EB89B43A5}"/>
+                <a16:creationId xmlns:a16="http://schemas.microsoft.com/office/drawing/2014/main" id="{E4CB107F-F119-4036-A23E-E624AD69910E}"/>
               </a:ext>
             </a:extLst>
           </p:cNvPr>
@@ -17375,7 +17375,7 @@
           <p:cNvPr id="6" name="">
             <a:extLst xmlns:a="http://schemas.openxmlformats.org/drawingml/2006/main">
               <a:ext uri="{FF2B5EF4-FFF2-40B4-BE49-F238E27FC236}">
-                <a16:creationId xmlns:a16="http://schemas.microsoft.com/office/drawing/2014/main" id="{6A588BDC-D690-4958-9E2E-C770BA8CA89D}"/>
+                <a16:creationId xmlns:a16="http://schemas.microsoft.com/office/drawing/2014/main" id="{54DBB7B8-46DC-49FD-9E62-B69552B49606}"/>
               </a:ext>
             </a:extLst>
           </p:cNvPr>
@@ -17426,7 +17426,7 @@
                 <a:ea typeface="IBM Plex Sans KR"/>
                 <a:cs typeface="IBM Plex Sans KR"/>
               </a:rPr>
-              <a:t>교과서 04-1 · 9쪽</a:t>
+              <a:t>교과서 04-1 · 12쪽</a:t>
             </a:r>
           </a:p>
         </p:txBody>
@@ -17436,7 +17436,7 @@
           <p:cNvPr id="7" name="">
             <a:extLst xmlns:a="http://schemas.openxmlformats.org/drawingml/2006/main">
               <a:ext uri="{FF2B5EF4-FFF2-40B4-BE49-F238E27FC236}">
-                <a16:creationId xmlns:a16="http://schemas.microsoft.com/office/drawing/2014/main" id="{A2566C95-2047-40F8-9ACA-C9CA3931C46B}"/>
+                <a16:creationId xmlns:a16="http://schemas.microsoft.com/office/drawing/2014/main" id="{8CFBBB84-A581-42FD-B704-F37346C97B1D}"/>
               </a:ext>
             </a:extLst>
           </p:cNvPr>
@@ -17497,7 +17497,7 @@
           <p:cNvPr id="8" name="">
             <a:extLst xmlns:a="http://schemas.openxmlformats.org/drawingml/2006/main">
               <a:ext uri="{FF2B5EF4-FFF2-40B4-BE49-F238E27FC236}">
-                <a16:creationId xmlns:a16="http://schemas.microsoft.com/office/drawing/2014/main" id="{605A0985-C7B1-42B6-A51E-328164905CA7}"/>
+                <a16:creationId xmlns:a16="http://schemas.microsoft.com/office/drawing/2014/main" id="{842D302A-BCEB-403C-90F4-D87261998F0D}"/>
               </a:ext>
             </a:extLst>
           </p:cNvPr>
@@ -17531,7 +17531,7 @@
           <p:cNvPr id="9" name="">
             <a:extLst xmlns:a="http://schemas.openxmlformats.org/drawingml/2006/main">
               <a:ext uri="{FF2B5EF4-FFF2-40B4-BE49-F238E27FC236}">
-                <a16:creationId xmlns:a16="http://schemas.microsoft.com/office/drawing/2014/main" id="{56A61622-DC55-4FA4-A052-BE0EC03A4D37}"/>
+                <a16:creationId xmlns:a16="http://schemas.microsoft.com/office/drawing/2014/main" id="{2D5E6F49-E01C-40DB-A472-53BF75FDFF29}"/>
               </a:ext>
             </a:extLst>
           </p:cNvPr>
@@ -17592,7 +17592,7 @@
           <p:cNvPr id="10" name="">
             <a:extLst xmlns:a="http://schemas.openxmlformats.org/drawingml/2006/main">
               <a:ext uri="{FF2B5EF4-FFF2-40B4-BE49-F238E27FC236}">
-                <a16:creationId xmlns:a16="http://schemas.microsoft.com/office/drawing/2014/main" id="{3D1CD022-11E1-41EB-8953-B2986D19316C}"/>
+                <a16:creationId xmlns:a16="http://schemas.microsoft.com/office/drawing/2014/main" id="{688EF815-88EC-4868-9941-AE9F2ADBE3A0}"/>
               </a:ext>
             </a:extLst>
           </p:cNvPr>
@@ -17653,7 +17653,7 @@
           <p:cNvPr id="11" name="">
             <a:extLst xmlns:a="http://schemas.openxmlformats.org/drawingml/2006/main">
               <a:ext uri="{FF2B5EF4-FFF2-40B4-BE49-F238E27FC236}">
-                <a16:creationId xmlns:a16="http://schemas.microsoft.com/office/drawing/2014/main" id="{C7AD77F8-ED12-492D-A06E-47FA8D89D68C}"/>
+                <a16:creationId xmlns:a16="http://schemas.microsoft.com/office/drawing/2014/main" id="{0F939A4E-44C2-4BC7-944C-A4CBF6C1D1BD}"/>
               </a:ext>
             </a:extLst>
           </p:cNvPr>
@@ -17714,7 +17714,7 @@
           <p:cNvPr id="12" name="">
             <a:extLst xmlns:a="http://schemas.openxmlformats.org/drawingml/2006/main">
               <a:ext uri="{FF2B5EF4-FFF2-40B4-BE49-F238E27FC236}">
-                <a16:creationId xmlns:a16="http://schemas.microsoft.com/office/drawing/2014/main" id="{1A32D6A8-605E-4756-8834-07FD7FBC130E}"/>
+                <a16:creationId xmlns:a16="http://schemas.microsoft.com/office/drawing/2014/main" id="{195EE242-2E85-41A9-85F9-7E1E8EAF5167}"/>
               </a:ext>
             </a:extLst>
           </p:cNvPr>
@@ -17748,7 +17748,7 @@
           <p:cNvPr id="13" name="">
             <a:extLst xmlns:a="http://schemas.openxmlformats.org/drawingml/2006/main">
               <a:ext uri="{FF2B5EF4-FFF2-40B4-BE49-F238E27FC236}">
-                <a16:creationId xmlns:a16="http://schemas.microsoft.com/office/drawing/2014/main" id="{CC4A55A6-CC4A-4555-949A-A4EA3A9E264E}"/>
+                <a16:creationId xmlns:a16="http://schemas.microsoft.com/office/drawing/2014/main" id="{5FA6C756-D359-4AA0-A20F-CCF6689D94D2}"/>
               </a:ext>
             </a:extLst>
           </p:cNvPr>
@@ -17809,7 +17809,7 @@
           <p:cNvPr id="14" name="">
             <a:extLst xmlns:a="http://schemas.openxmlformats.org/drawingml/2006/main">
               <a:ext uri="{FF2B5EF4-FFF2-40B4-BE49-F238E27FC236}">
-                <a16:creationId xmlns:a16="http://schemas.microsoft.com/office/drawing/2014/main" id="{8DADCA01-766F-433A-A170-1097EBBF0F55}"/>
+                <a16:creationId xmlns:a16="http://schemas.microsoft.com/office/drawing/2014/main" id="{2B7CF1BF-B7BB-43B6-92F2-8139C3ADF77D}"/>
               </a:ext>
             </a:extLst>
           </p:cNvPr>
@@ -17870,7 +17870,7 @@
           <p:cNvPr id="15" name="">
             <a:extLst xmlns:a="http://schemas.openxmlformats.org/drawingml/2006/main">
               <a:ext uri="{FF2B5EF4-FFF2-40B4-BE49-F238E27FC236}">
-                <a16:creationId xmlns:a16="http://schemas.microsoft.com/office/drawing/2014/main" id="{D8DBD357-BF48-4BB6-86F5-997BD48F88B6}"/>
+                <a16:creationId xmlns:a16="http://schemas.microsoft.com/office/drawing/2014/main" id="{92EC37CB-AEAD-483C-9FAB-E99AD84EBD38}"/>
               </a:ext>
             </a:extLst>
           </p:cNvPr>
@@ -17931,7 +17931,7 @@
           <p:cNvPr id="16" name="">
             <a:extLst xmlns:a="http://schemas.openxmlformats.org/drawingml/2006/main">
               <a:ext uri="{FF2B5EF4-FFF2-40B4-BE49-F238E27FC236}">
-                <a16:creationId xmlns:a16="http://schemas.microsoft.com/office/drawing/2014/main" id="{F79F3015-2742-4194-A5E0-EB8B1D6D3A8C}"/>
+                <a16:creationId xmlns:a16="http://schemas.microsoft.com/office/drawing/2014/main" id="{5CCC0301-770C-425B-878D-101DAAA41D38}"/>
               </a:ext>
             </a:extLst>
           </p:cNvPr>
@@ -17965,7 +17965,7 @@
           <p:cNvPr id="17" name="">
             <a:extLst xmlns:a="http://schemas.openxmlformats.org/drawingml/2006/main">
               <a:ext uri="{FF2B5EF4-FFF2-40B4-BE49-F238E27FC236}">
-                <a16:creationId xmlns:a16="http://schemas.microsoft.com/office/drawing/2014/main" id="{10D9D856-732A-4A59-B4B3-C46194A0A4ED}"/>
+                <a16:creationId xmlns:a16="http://schemas.microsoft.com/office/drawing/2014/main" id="{38B6B393-BB20-4281-A6E4-D74322A87904}"/>
               </a:ext>
             </a:extLst>
           </p:cNvPr>
@@ -18026,7 +18026,7 @@
           <p:cNvPr id="18" name="">
             <a:extLst xmlns:a="http://schemas.openxmlformats.org/drawingml/2006/main">
               <a:ext uri="{FF2B5EF4-FFF2-40B4-BE49-F238E27FC236}">
-                <a16:creationId xmlns:a16="http://schemas.microsoft.com/office/drawing/2014/main" id="{D997D6CD-1262-4C65-B5B3-5DD784D187B3}"/>
+                <a16:creationId xmlns:a16="http://schemas.microsoft.com/office/drawing/2014/main" id="{4203B570-8DFD-4FA3-88CA-1BF343A22BD3}"/>
               </a:ext>
             </a:extLst>
           </p:cNvPr>
@@ -18087,7 +18087,7 @@
           <p:cNvPr id="19" name="">
             <a:extLst xmlns:a="http://schemas.openxmlformats.org/drawingml/2006/main">
               <a:ext uri="{FF2B5EF4-FFF2-40B4-BE49-F238E27FC236}">
-                <a16:creationId xmlns:a16="http://schemas.microsoft.com/office/drawing/2014/main" id="{27BD6CBE-499D-44A2-B760-75DC35B76428}"/>
+                <a16:creationId xmlns:a16="http://schemas.microsoft.com/office/drawing/2014/main" id="{DC92A474-BE29-4465-BFE3-1244366C3B02}"/>
               </a:ext>
             </a:extLst>
           </p:cNvPr>
@@ -18152,7 +18152,7 @@
           <p:nvPr/>
         </p:nvPicPr>
         <p:blipFill>
-          <a:blip xmlns:r="http://schemas.openxmlformats.org/officeDocument/2006/relationships" xmlns:a="http://schemas.openxmlformats.org/drawingml/2006/main" r:embed="Rfce6e8a2e4424b1c"/>
+          <a:blip xmlns:r="http://schemas.openxmlformats.org/officeDocument/2006/relationships" xmlns:a="http://schemas.openxmlformats.org/drawingml/2006/main" r:embed="Rdcc5448b5e9b4e0f"/>
           <a:stretch xmlns:a="http://schemas.openxmlformats.org/drawingml/2006/main"/>
         </p:blipFill>
         <p:spPr>
@@ -18168,7 +18168,7 @@
     </p:spTree>
     <p:extLst>
       <p:ext uri="{BB962C8B-B14F-4D97-AF65-F5344CB8AC3E}">
-        <p14:creationId xmlns:p14="http://schemas.microsoft.com/office/powerpoint/2010/main" val="1441688103"/>
+        <p14:creationId xmlns:p14="http://schemas.microsoft.com/office/powerpoint/2010/main" val="2107423269"/>
       </p:ext>
     </p:extLst>
   </p:cSld>
